--- a/SSGI_상세기획서_심사위원용.pptx
+++ b/SSGI_상세기획서_심사위원용.pptx
@@ -7315,7 +7315,7 @@
                 </a:solidFill>
                 <a:latin typeface="Pretendard Variable"/>
               </a:rPr>
-              <a:t>GPT-4o (deep-report 프롬프트). 업종 분기 + 사장님 화법. "이번 주 1가지"로 우선순위를 좁힘. 추정 매출·효과는 amber "AI 추정" 라벨 의무.</a:t>
+              <a:t>GPT-4o (deep-report 프롬프트). 세부 업종 플레이북(데이터 해석 주의 포함) + 사장님 화법. "이번 주 1가지"로 우선순위를 좁힘. 추정 매출·효과는 amber "AI 추정" 라벨 의무.</a:t>
             </a:r>
           </a:p>
         </p:txBody>
@@ -8640,7 +8640,7 @@
                 </a:solidFill>
                 <a:latin typeface="Pretendard Variable"/>
               </a:rPr>
-              <a:t>GPT-4o (marketing-strategy 프롬프트). 업종별 채널 매트릭스(배민·인스타·네이버·카카오 단골) — 업종 안 맞는 헛조언 차단. ROI 수치는 "가설" 라벨, 결제 데이터 아님.</a:t>
+              <a:t>GPT-4o (marketing-strategy 프롬프트). 업종 플레이북의 채널 근거표를 그대로 주입(이 표 밖의 ROI/ROAS 숫자 생성 금지) — 업종 안 맞는 헛조언 차단. ROI 수치는 "가설" 라벨, 결제 데이터 아님.</a:t>
             </a:r>
           </a:p>
         </p:txBody>
@@ -14811,8 +14811,8 @@
         </p:nvSpPr>
         <p:spPr>
           <a:xfrm>
-            <a:off x="609600" y="5575300"/>
-            <a:ext cx="10972800" cy="520700"/>
+            <a:off x="609600" y="5537200"/>
+            <a:ext cx="10972800" cy="596900"/>
           </a:xfrm>
           <a:prstGeom prst="roundRect">
             <a:avLst>
@@ -14857,8 +14857,8 @@
         </p:nvSpPr>
         <p:spPr>
           <a:xfrm>
-            <a:off x="787400" y="5702300"/>
-            <a:ext cx="10617200" cy="292100"/>
+            <a:off x="787400" y="5613400"/>
+            <a:ext cx="10668000" cy="457200"/>
           </a:xfrm>
           <a:prstGeom prst="rect">
             <a:avLst/>
@@ -14873,17 +14873,18 @@
           <a:p>
             <a:pPr algn="l">
               <a:lnSpc>
-                <a:spcPct val="120000"/>
-              </a:lnSpc>
-            </a:pPr>
-            <a:r>
-              <a:rPr sz="1500" b="1">
+                <a:spcPct val="130000"/>
+              </a:lnSpc>
+            </a:pPr>
+            <a:r>
+              <a:rPr sz="1250" b="1">
                 <a:solidFill>
                   <a:srgbClr val="0F4C92"/>
                 </a:solidFill>
                 <a:latin typeface="Pretendard Variable"/>
               </a:rPr>
-              <a:t>+ 대시보드 어디서나 음성 질문(플로팅 마이크) → 답변 + 해당 화면으로 자동 이동.</a:t>
+              <a:t>+ 음성 질문(플로팅 마이크) 어디서나 → 답변 + 해당 화면 자동 이동.
++ 내 가게 페이지 — 로그인한 사장님도 업종 재설정(/profile) · "이 진단은 ○○ 플레이북 v1 · 검수 2026-05-11 · 출처 N건" 출처 칩.</a:t>
             </a:r>
           </a:p>
         </p:txBody>
@@ -14958,7 +14959,7 @@
                 </a:solidFill>
                 <a:latin typeface="Pretendard Variable"/>
               </a:rPr>
-              <a:t>frontend/src/app — 메인 4 라우트 + insights 4탭 + onboarding / 라이브 시연 가능</a:t>
+              <a:t>frontend/src/app — 메인 4 라우트 + insights 4탭 + onboarding·내 가게 / 라이브 시연 가능</a:t>
             </a:r>
           </a:p>
         </p:txBody>
@@ -16226,7 +16227,7 @@
                 </a:solidFill>
                 <a:latin typeface="Pretendard Variable"/>
               </a:rPr>
-              <a:t>전 화면 라이브 호출 — 백엔드 31개 API 라우트 / 시연 시 실물 데모 가능</a:t>
+              <a:t>전 화면 라이브 호출 — 백엔드 33개 API 라우트 / 시연 시 실물 데모 가능</a:t>
             </a:r>
           </a:p>
         </p:txBody>
@@ -23192,7 +23193,7 @@
                 </a:solidFill>
                 <a:latin typeface="Pretendard Variable"/>
               </a:rPr>
-              <a:t>지원사업 DB 자동 수집 · 업종 확장</a:t>
+              <a:t>지원사업 DB 자동 수집 · 업종 플레이북 40→100+ · 1차 출처 보강</a:t>
             </a:r>
           </a:p>
         </p:txBody>
@@ -26018,7 +26019,7 @@
                 </a:solidFill>
                 <a:latin typeface="Pretendard Variable"/>
               </a:rPr>
-              <a:t>상권코드↔행정동 매핑·분기 캐싱·업종 코드명 정규화를 모듈화 — 다른 서비스도 같은 방식으로 서울 데이터 활용.</a:t>
+              <a:t>상권코드↔행정동 매핑·분기 캐싱·업종 정규화를 모듈화 — 다른 서비스도 같은 방식으로 서울 데이터 활용. 업종 지식은 YAML 플레이북으로 분리(파일 1개 = 새 업종).</a:t>
             </a:r>
           </a:p>
         </p:txBody>
@@ -28213,7 +28214,7 @@
                 </a:solidFill>
                 <a:latin typeface="Pretendard Variable"/>
               </a:rPr>
-              <a:t>라이브 배포: ssgi-ai-coach.vercel.app — 31개 API 라우트 구동 중</a:t>
+              <a:t>라이브 배포: ssgi-ai-coach.vercel.app — 33개 API 라우트 구동 중</a:t>
             </a:r>
           </a:p>
         </p:txBody>
@@ -31451,7 +31452,7 @@
                 </a:solidFill>
                 <a:latin typeface="Pretendard Variable"/>
               </a:rPr>
-              <a:t>지원사업 공고를 text-embedding-3-small 로 임베딩 → ChromaDB(코사인)에 인덱싱. 사장님 업종·매출·사업기간을 쿼리로 top-k 매칭. "왜 맞는지" 근거 문장도 함께.</a:t>
+              <a:t>지원사업 공고를 text-embedding-3-small 로 임베딩 → ChromaDB(코사인)에 인덱싱. 사장님 업종·매출·사업기간을 쿼리로 top-k 매칭 + 업종별 지원금 카테고리 태그로 가중. "왜 맞는지" 근거 문장도 함께.</a:t>
             </a:r>
           </a:p>
         </p:txBody>
@@ -31706,7 +31707,7 @@
                 </a:solidFill>
                 <a:latin typeface="Pretendard Variable"/>
               </a:rPr>
-              <a:t>매일 1줄 액션 · AI 종합진단 · 마케팅/메뉴 전략. 시스템 프롬프트에 "업종 분기 가이드(6대 업종군 KPI·채널)" + "손실 프레이밍 어법" 임베드. 추정치는 amber "AI 추정" 라벨 강제.</a:t>
+              <a:t>매일 1줄 액션 · AI 종합진단 · 마케팅/메뉴 전략. 시스템 프롬프트에 "업종 플레이북(40개 세부 업종 YAML 지식팩 — KPI·채널 근거표·카피 톤·데이터 해석 주의)" + "손실 프레이밍 어법"을 런타임 주입. 추정치는 amber "AI 추정" 라벨 강제.</a:t>
             </a:r>
           </a:p>
         </p:txBody>
@@ -34052,7 +34053,7 @@
                 </a:solidFill>
                 <a:latin typeface="Pretendard Variable"/>
               </a:rPr>
-              <a:t>GPT-4o. 시스템 프롬프트에 6대 업종군 분기 가이드(업종별 다른 KPI·채널) + 손실 프레이밍 어법 임베드. 같은 가게에 같은 액션 반복 방지.</a:t>
+              <a:t>GPT-4o. 시스템 프롬프트에 업종 플레이북(40개 세부 업종 YAML 지식팩 — 업종별 KPI·채널·데이터 함정) + 손실 프레이밍 어법 주입. 같은 가게에 같은 액션 반복 방지.</a:t>
             </a:r>
           </a:p>
         </p:txBody>

--- a/SSGI_상세기획서_심사위원용.pptx
+++ b/SSGI_상세기획서_심사위원용.pptx
@@ -3229,8 +3229,8 @@
                 </a:solidFill>
                 <a:latin typeface="Pretendard Variable"/>
               </a:rPr>
-              <a:t>2026 SEOUL BIG DATA
-COMPETITION · 창업부문</a:t>
+              <a:t>2026 서울시 빅데이터 경진대회
+창업부문</a:t>
             </a:r>
           </a:p>
         </p:txBody>
@@ -3354,7 +3354,7 @@
                 </a:solidFill>
                 <a:latin typeface="Pretendard Variable"/>
               </a:rPr>
-              <a:t>PRODUCT · SERVICE TRACK · 상세기획서</a:t>
+              <a:t>제품·서비스 부문 · 상세기획서</a:t>
             </a:r>
           </a:p>
         </p:txBody>
@@ -3393,7 +3393,7 @@
                 </a:solidFill>
                 <a:latin typeface="Pretendard Variable"/>
               </a:rPr>
-              <a:t>SOSANGGONGIN · AI BUSINESS COACH</a:t>
+              <a:t>동네 가게를 위한 AI 경영코치</a:t>
             </a:r>
           </a:p>
         </p:txBody>
@@ -3604,7 +3604,7 @@
                 </a:solidFill>
                 <a:latin typeface="Pretendard Variable"/>
               </a:rPr>
-              <a:t>LIVE FEATURES</a:t>
+              <a:t>라이브 기능</a:t>
             </a:r>
           </a:p>
         </p:txBody>
@@ -3730,7 +3730,7 @@
                 </a:solidFill>
                 <a:latin typeface="Pretendard Variable"/>
               </a:rPr>
-              <a:t>SEOUL OPEN DATA</a:t>
+              <a:t>공공데이터</a:t>
             </a:r>
           </a:p>
         </p:txBody>
@@ -3769,7 +3769,7 @@
                 </a:solidFill>
                 <a:latin typeface="Pretendard Variable"/>
               </a:rPr>
-              <a:t>8</a:t>
+              <a:t>10</a:t>
             </a:r>
             <a:r>
               <a:rPr sz="1700" b="1">
@@ -3817,7 +3817,7 @@
                 </a:solidFill>
                 <a:latin typeface="Pretendard Variable"/>
               </a:rPr>
-              <a:t>열린데이터광장 데이터셋</a:t>
+              <a:t>열린데이터광장 8 · 포털 2</a:t>
             </a:r>
           </a:p>
         </p:txBody>
@@ -3856,7 +3856,7 @@
                 </a:solidFill>
                 <a:latin typeface="Pretendard Variable"/>
               </a:rPr>
-              <a:t>PAID USERS</a:t>
+              <a:t>유료 사용자</a:t>
             </a:r>
           </a:p>
         </p:txBody>
@@ -5890,7 +5890,7 @@
                 </a:solidFill>
                 <a:latin typeface="Pretendard Variable"/>
               </a:rPr>
-              <a:t>우리마을가게 상권분석(매출·점포수) · 행정동 생활인구(SPOP_LOCAL_RESD_DONG) · 상권 유동인구·직장인구.</a:t>
+              <a:t>서울시 상권분석서비스(추정매출·점포·길단위인구·직장인구-상권) · 행정동 단위 서울 생활인구(내국인).</a:t>
             </a:r>
           </a:p>
         </p:txBody>
@@ -8470,7 +8470,7 @@
                 </a:solidFill>
                 <a:latin typeface="Pretendard Variable"/>
               </a:rPr>
-              <a:t>상권 유동인구(VwsmTrdarFlpopQq — 시간대·요일·성·연령 → 피크 타임/타깃) · 우리마을가게 추정매출(객단가 비교).</a:t>
+              <a:t>서울시 상권분석서비스(길단위인구-상권 — 시간대·요일·성별·연령 → 피크 타임·타깃) · 추정매출-상권(객단가 비교).</a:t>
             </a:r>
           </a:p>
         </p:txBody>
@@ -9795,7 +9795,7 @@
                 </a:solidFill>
                 <a:latin typeface="Pretendard Variable"/>
               </a:rPr>
-              <a:t>상권 업종 구성(다양성지수 — 우리마을가게 상권분석 기반) · 서울 문화행사(culturalEventInfo) · 계절·학사 일정.</a:t>
+              <a:t>상권 업종 구성(다양성지수 — 서울시 상권분석서비스 기반) · 서울시 문화행사 정보 · 계절·학사 일정.</a:t>
             </a:r>
           </a:p>
         </p:txBody>
@@ -11120,7 +11120,7 @@
                 </a:solidFill>
                 <a:latin typeface="Pretendard Variable"/>
               </a:rPr>
-              <a:t>서울 문화행사 정보(culturalEventInfo — 자치구 필터).</a:t>
+              <a:t>서울시 문화행사 정보(자치구 필터).</a:t>
             </a:r>
           </a:p>
         </p:txBody>
@@ -19662,7 +19662,7 @@
                 </a:solidFill>
                 <a:latin typeface="Pretendard Variable"/>
               </a:rPr>
-              <a:t>활용 공공데이터 — 서울 8종 + 국세청 표</a:t>
+              <a:t>활용 공공데이터 — 열린데이터광장 8 + 공공데이터포털 2</a:t>
             </a:r>
           </a:p>
         </p:txBody>
@@ -25679,7 +25679,7 @@
                 </a:solidFill>
                 <a:latin typeface="Pretendard Variable"/>
               </a:rPr>
-              <a:t>서울 열린데이터 8종을 한 화면에 결합·해석. "열려는 있지만 안 쓰이던" 데이터를 실제 경영 판단으로 연결.</a:t>
+              <a:t>공공데이터 10종(열린데이터광장 8 + 공공데이터포털 2)을 한 화면에 결합·해석. "열려는 있지만 안 쓰이던" 데이터를 실제 경영 판단으로 연결.</a:t>
             </a:r>
           </a:p>
         </p:txBody>
@@ -28478,7 +28478,7 @@
                 </a:solidFill>
                 <a:latin typeface="Pretendard Variable"/>
               </a:rPr>
-              <a:t>서울 열린데이터광장 </a:t>
+              <a:t>열린데이터광장 </a:t>
             </a:r>
             <a:r>
               <a:rPr sz="2800" b="1">
@@ -28496,7 +28496,25 @@
                 </a:solidFill>
                 <a:latin typeface="Pretendard Variable"/>
               </a:rPr>
-              <a:t> + 국세청 + 카카오 — 모두 라이브 호출 중.</a:t>
+              <a:t> + 공공데이터포털 </a:t>
+            </a:r>
+            <a:r>
+              <a:rPr sz="2800" b="1">
+                <a:solidFill>
+                  <a:srgbClr val="0F4C92"/>
+                </a:solidFill>
+                <a:latin typeface="Pretendard Variable"/>
+              </a:rPr>
+              <a:t>2종</a:t>
+            </a:r>
+            <a:r>
+              <a:rPr sz="2800" b="1">
+                <a:solidFill>
+                  <a:srgbClr val="0B1A33"/>
+                </a:solidFill>
+                <a:latin typeface="Pretendard Variable"/>
+              </a:rPr>
+              <a:t> — 모두 라이브 호출 중.</a:t>
             </a:r>
           </a:p>
         </p:txBody>
@@ -28535,7 +28553,7 @@
                 </a:solidFill>
                 <a:latin typeface="Pretendard Variable"/>
               </a:rPr>
-              <a:t>상권코드↔행정동 매핑(TbgisTrdarRelm)으로 "우리 동네"만 골라냅니다.</a:t>
+              <a:t>상권↔행정동 매핑(영역-상권 데이터셋)으로 "우리 동네"만 골라냅니다.</a:t>
             </a:r>
           </a:p>
         </p:txBody>
@@ -28610,7 +28628,7 @@
                 </a:solidFill>
                 <a:latin typeface="Pretendard Variable"/>
               </a:rPr>
-              <a:t>제공처 / API</a:t>
+              <a:t>출처</a:t>
             </a:r>
           </a:p>
         </p:txBody>
@@ -28623,7 +28641,7 @@
         </p:nvSpPr>
         <p:spPr>
           <a:xfrm>
-            <a:off x="3047999" y="2019299"/>
+            <a:off x="1612900" y="2019299"/>
             <a:ext cx="2286000" cy="165100"/>
           </a:xfrm>
           <a:prstGeom prst="rect">
@@ -28649,7 +28667,7 @@
                 </a:solidFill>
                 <a:latin typeface="Pretendard Variable"/>
               </a:rPr>
-              <a:t>데이터셋 (호출 식별자)</a:t>
+              <a:t>데이터셋명</a:t>
             </a:r>
           </a:p>
         </p:txBody>
@@ -28662,7 +28680,7 @@
         </p:nvSpPr>
         <p:spPr>
           <a:xfrm>
-            <a:off x="8762999" y="2019299"/>
+            <a:off x="6286500" y="2019299"/>
             <a:ext cx="2286000" cy="165100"/>
           </a:xfrm>
           <a:prstGeom prst="rect">
@@ -28688,7 +28706,7 @@
                 </a:solidFill>
                 <a:latin typeface="Pretendard Variable"/>
               </a:rPr>
-              <a:t>쓰는 곳</a:t>
+              <a:t>제공기관</a:t>
             </a:r>
           </a:p>
         </p:txBody>
@@ -28701,7 +28719,7 @@
         </p:nvSpPr>
         <p:spPr>
           <a:xfrm>
-            <a:off x="10795000" y="2019299"/>
+            <a:off x="7619999" y="2019299"/>
             <a:ext cx="2286000" cy="165100"/>
           </a:xfrm>
           <a:prstGeom prst="rect">
@@ -28727,21 +28745,60 @@
                 </a:solidFill>
                 <a:latin typeface="Pretendard Variable"/>
               </a:rPr>
-              <a:t>주기</a:t>
-            </a:r>
-          </a:p>
-        </p:txBody>
-      </p:sp>
-      <p:sp>
-        <p:nvSpPr>
-          <p:cNvPr id="13" name="Rectangle 12"/>
+              <a:t>우리 앱 활용</a:t>
+            </a:r>
+          </a:p>
+        </p:txBody>
+      </p:sp>
+      <p:sp>
+        <p:nvSpPr>
+          <p:cNvPr id="13" name="TextBox 12"/>
+          <p:cNvSpPr txBox="1"/>
+          <p:nvPr/>
+        </p:nvSpPr>
+        <p:spPr>
+          <a:xfrm>
+            <a:off x="10287000" y="2019299"/>
+            <a:ext cx="2286000" cy="165100"/>
+          </a:xfrm>
+          <a:prstGeom prst="rect">
+            <a:avLst/>
+          </a:prstGeom>
+          <a:noFill/>
+        </p:spPr>
+        <p:txBody>
+          <a:bodyPr wrap="square" lIns="0" rIns="0" tIns="0" bIns="0" anchor="t">
+            <a:spAutoFit/>
+          </a:bodyPr>
+          <a:lstStyle/>
+          <a:p>
+            <a:pPr algn="l">
+              <a:lnSpc>
+                <a:spcPct val="120000"/>
+              </a:lnSpc>
+            </a:pPr>
+            <a:r>
+              <a:rPr sz="1150" b="1">
+                <a:solidFill>
+                  <a:srgbClr val="0B1A33"/>
+                </a:solidFill>
+                <a:latin typeface="Pretendard Variable"/>
+              </a:rPr>
+              <a:t>갱신</a:t>
+            </a:r>
+          </a:p>
+        </p:txBody>
+      </p:sp>
+      <p:sp>
+        <p:nvSpPr>
+          <p:cNvPr id="14" name="Rectangle 13"/>
           <p:cNvSpPr/>
           <p:nvPr/>
         </p:nvSpPr>
         <p:spPr>
           <a:xfrm>
-            <a:off x="609600" y="2235200"/>
-            <a:ext cx="10972800" cy="355599"/>
+            <a:off x="609600" y="2241550"/>
+            <a:ext cx="10972800" cy="342900"/>
           </a:xfrm>
           <a:prstGeom prst="rect">
             <a:avLst/>
@@ -28778,14 +28835,14 @@
       </p:sp>
       <p:sp>
         <p:nvSpPr>
-          <p:cNvPr id="14" name="TextBox 13"/>
+          <p:cNvPr id="15" name="TextBox 14"/>
           <p:cNvSpPr txBox="1"/>
           <p:nvPr/>
         </p:nvSpPr>
         <p:spPr>
           <a:xfrm>
             <a:off x="609600" y="2273300"/>
-            <a:ext cx="2413000" cy="279400"/>
+            <a:ext cx="952499" cy="266699"/>
           </a:xfrm>
           <a:prstGeom prst="rect">
             <a:avLst/>
@@ -28804,27 +28861,27 @@
               </a:lnSpc>
             </a:pPr>
             <a:r>
-              <a:rPr sz="1100" b="1">
+              <a:rPr sz="1000" b="1">
                 <a:solidFill>
                   <a:srgbClr val="0F4C92"/>
                 </a:solidFill>
                 <a:latin typeface="Pretendard Variable"/>
               </a:rPr>
-              <a:t>서울 열린데이터</a:t>
-            </a:r>
-          </a:p>
-        </p:txBody>
-      </p:sp>
-      <p:sp>
-        <p:nvSpPr>
-          <p:cNvPr id="15" name="TextBox 14"/>
-          <p:cNvSpPr txBox="1"/>
-          <p:nvPr/>
-        </p:nvSpPr>
-        <p:spPr>
-          <a:xfrm>
-            <a:off x="3047999" y="2273300"/>
-            <a:ext cx="5588000" cy="279400"/>
+              <a:t>열린데이터광장</a:t>
+            </a:r>
+          </a:p>
+        </p:txBody>
+      </p:sp>
+      <p:sp>
+        <p:nvSpPr>
+          <p:cNvPr id="16" name="TextBox 15"/>
+          <p:cNvSpPr txBox="1"/>
+          <p:nvPr/>
+        </p:nvSpPr>
+        <p:spPr>
+          <a:xfrm>
+            <a:off x="1612900" y="2273300"/>
+            <a:ext cx="4572000" cy="266699"/>
           </a:xfrm>
           <a:prstGeom prst="rect">
             <a:avLst/>
@@ -28843,27 +28900,66 @@
               </a:lnSpc>
             </a:pPr>
             <a:r>
-              <a:rPr sz="1100" b="0">
+              <a:rPr sz="1050" b="0">
+                <a:solidFill>
+                  <a:srgbClr val="0B1A33"/>
+                </a:solidFill>
+                <a:latin typeface="Pretendard Variable"/>
+              </a:rPr>
+              <a:t>서울시 상권분석서비스(추정매출-상권)</a:t>
+            </a:r>
+          </a:p>
+        </p:txBody>
+      </p:sp>
+      <p:sp>
+        <p:nvSpPr>
+          <p:cNvPr id="17" name="TextBox 16"/>
+          <p:cNvSpPr txBox="1"/>
+          <p:nvPr/>
+        </p:nvSpPr>
+        <p:spPr>
+          <a:xfrm>
+            <a:off x="6286500" y="2273300"/>
+            <a:ext cx="1270000" cy="266699"/>
+          </a:xfrm>
+          <a:prstGeom prst="rect">
+            <a:avLst/>
+          </a:prstGeom>
+          <a:noFill/>
+        </p:spPr>
+        <p:txBody>
+          <a:bodyPr wrap="square" lIns="0" rIns="0" tIns="0" bIns="0" anchor="ctr">
+            <a:spAutoFit/>
+          </a:bodyPr>
+          <a:lstStyle/>
+          <a:p>
+            <a:pPr algn="l">
+              <a:lnSpc>
+                <a:spcPct val="120000"/>
+              </a:lnSpc>
+            </a:pPr>
+            <a:r>
+              <a:rPr sz="1000" b="0">
                 <a:solidFill>
                   <a:srgbClr val="4A5878"/>
                 </a:solidFill>
                 <a:latin typeface="Pretendard Variable"/>
               </a:rPr>
-              <a:t>VwsmTrdarSelngQq · 우리마을가게 상권분석(추정매출)</a:t>
-            </a:r>
-          </a:p>
-        </p:txBody>
-      </p:sp>
-      <p:sp>
-        <p:nvSpPr>
-          <p:cNvPr id="16" name="TextBox 15"/>
-          <p:cNvSpPr txBox="1"/>
-          <p:nvPr/>
-        </p:nvSpPr>
-        <p:spPr>
-          <a:xfrm>
-            <a:off x="8762999" y="2273300"/>
-            <a:ext cx="1968500" cy="279400"/>
+              <a:t>서울신용보증재단</a:t>
+            </a:r>
+          </a:p>
+        </p:txBody>
+      </p:sp>
+      <p:sp>
+        <p:nvSpPr>
+          <p:cNvPr id="18" name="TextBox 17"/>
+          <p:cNvSpPr txBox="1"/>
+          <p:nvPr/>
+        </p:nvSpPr>
+        <p:spPr>
+          <a:xfrm>
+            <a:off x="7619999" y="2273300"/>
+            <a:ext cx="2603499" cy="266699"/>
           </a:xfrm>
           <a:prstGeom prst="rect">
             <a:avLst/>
@@ -28882,27 +28978,27 @@
               </a:lnSpc>
             </a:pPr>
             <a:r>
-              <a:rPr sz="1100" b="0">
+              <a:rPr sz="1000" b="0">
                 <a:solidFill>
                   <a:srgbClr val="4A5878"/>
                 </a:solidFill>
                 <a:latin typeface="Pretendard Variable"/>
               </a:rPr>
-              <a:t>위험도·경쟁·객단가</a:t>
-            </a:r>
-          </a:p>
-        </p:txBody>
-      </p:sp>
-      <p:sp>
-        <p:nvSpPr>
-          <p:cNvPr id="17" name="TextBox 16"/>
-          <p:cNvSpPr txBox="1"/>
-          <p:nvPr/>
-        </p:nvSpPr>
-        <p:spPr>
-          <a:xfrm>
-            <a:off x="10795000" y="2273300"/>
-            <a:ext cx="787400" cy="279400"/>
+              <a:t>위험도·경쟁·객단가 분석</a:t>
+            </a:r>
+          </a:p>
+        </p:txBody>
+      </p:sp>
+      <p:sp>
+        <p:nvSpPr>
+          <p:cNvPr id="19" name="TextBox 18"/>
+          <p:cNvSpPr txBox="1"/>
+          <p:nvPr/>
+        </p:nvSpPr>
+        <p:spPr>
+          <a:xfrm>
+            <a:off x="10287000" y="2273300"/>
+            <a:ext cx="761999" cy="266699"/>
           </a:xfrm>
           <a:prstGeom prst="rect">
             <a:avLst/>
@@ -28921,7 +29017,7 @@
               </a:lnSpc>
             </a:pPr>
             <a:r>
-              <a:rPr sz="1100" b="0">
+              <a:rPr sz="1000" b="0">
                 <a:solidFill>
                   <a:srgbClr val="8A95AE"/>
                 </a:solidFill>
@@ -28934,14 +29030,14 @@
       </p:sp>
       <p:sp>
         <p:nvSpPr>
-          <p:cNvPr id="18" name="TextBox 17"/>
-          <p:cNvSpPr txBox="1"/>
-          <p:nvPr/>
-        </p:nvSpPr>
-        <p:spPr>
-          <a:xfrm>
-            <a:off x="609600" y="2654300"/>
-            <a:ext cx="2413000" cy="279400"/>
+          <p:cNvPr id="20" name="TextBox 19"/>
+          <p:cNvSpPr txBox="1"/>
+          <p:nvPr/>
+        </p:nvSpPr>
+        <p:spPr>
+          <a:xfrm>
+            <a:off x="609600" y="2641600"/>
+            <a:ext cx="952499" cy="266699"/>
           </a:xfrm>
           <a:prstGeom prst="rect">
             <a:avLst/>
@@ -28960,27 +29056,27 @@
               </a:lnSpc>
             </a:pPr>
             <a:r>
-              <a:rPr sz="1100" b="1">
+              <a:rPr sz="1000" b="1">
                 <a:solidFill>
                   <a:srgbClr val="0F4C92"/>
                 </a:solidFill>
                 <a:latin typeface="Pretendard Variable"/>
               </a:rPr>
-              <a:t>서울 열린데이터</a:t>
-            </a:r>
-          </a:p>
-        </p:txBody>
-      </p:sp>
-      <p:sp>
-        <p:nvSpPr>
-          <p:cNvPr id="19" name="TextBox 18"/>
-          <p:cNvSpPr txBox="1"/>
-          <p:nvPr/>
-        </p:nvSpPr>
-        <p:spPr>
-          <a:xfrm>
-            <a:off x="3047999" y="2654300"/>
-            <a:ext cx="5588000" cy="279400"/>
+              <a:t>열린데이터광장</a:t>
+            </a:r>
+          </a:p>
+        </p:txBody>
+      </p:sp>
+      <p:sp>
+        <p:nvSpPr>
+          <p:cNvPr id="21" name="TextBox 20"/>
+          <p:cNvSpPr txBox="1"/>
+          <p:nvPr/>
+        </p:nvSpPr>
+        <p:spPr>
+          <a:xfrm>
+            <a:off x="1612900" y="2641600"/>
+            <a:ext cx="4572000" cy="266699"/>
           </a:xfrm>
           <a:prstGeom prst="rect">
             <a:avLst/>
@@ -28999,27 +29095,66 @@
               </a:lnSpc>
             </a:pPr>
             <a:r>
-              <a:rPr sz="1100" b="0">
+              <a:rPr sz="1050" b="0">
+                <a:solidFill>
+                  <a:srgbClr val="0B1A33"/>
+                </a:solidFill>
+                <a:latin typeface="Pretendard Variable"/>
+              </a:rPr>
+              <a:t>서울시 상권분석서비스(점포-상권)</a:t>
+            </a:r>
+          </a:p>
+        </p:txBody>
+      </p:sp>
+      <p:sp>
+        <p:nvSpPr>
+          <p:cNvPr id="22" name="TextBox 21"/>
+          <p:cNvSpPr txBox="1"/>
+          <p:nvPr/>
+        </p:nvSpPr>
+        <p:spPr>
+          <a:xfrm>
+            <a:off x="6286500" y="2641600"/>
+            <a:ext cx="1270000" cy="266699"/>
+          </a:xfrm>
+          <a:prstGeom prst="rect">
+            <a:avLst/>
+          </a:prstGeom>
+          <a:noFill/>
+        </p:spPr>
+        <p:txBody>
+          <a:bodyPr wrap="square" lIns="0" rIns="0" tIns="0" bIns="0" anchor="ctr">
+            <a:spAutoFit/>
+          </a:bodyPr>
+          <a:lstStyle/>
+          <a:p>
+            <a:pPr algn="l">
+              <a:lnSpc>
+                <a:spcPct val="120000"/>
+              </a:lnSpc>
+            </a:pPr>
+            <a:r>
+              <a:rPr sz="1000" b="0">
                 <a:solidFill>
                   <a:srgbClr val="4A5878"/>
                 </a:solidFill>
                 <a:latin typeface="Pretendard Variable"/>
               </a:rPr>
-              <a:t>VwsmTrdarStorQq · 우리마을가게 상권분석(점포수·개폐업)</a:t>
-            </a:r>
-          </a:p>
-        </p:txBody>
-      </p:sp>
-      <p:sp>
-        <p:nvSpPr>
-          <p:cNvPr id="20" name="TextBox 19"/>
-          <p:cNvSpPr txBox="1"/>
-          <p:nvPr/>
-        </p:nvSpPr>
-        <p:spPr>
-          <a:xfrm>
-            <a:off x="8762999" y="2654300"/>
-            <a:ext cx="1968500" cy="279400"/>
+              <a:t>서울신용보증재단</a:t>
+            </a:r>
+          </a:p>
+        </p:txBody>
+      </p:sp>
+      <p:sp>
+        <p:nvSpPr>
+          <p:cNvPr id="23" name="TextBox 22"/>
+          <p:cNvSpPr txBox="1"/>
+          <p:nvPr/>
+        </p:nvSpPr>
+        <p:spPr>
+          <a:xfrm>
+            <a:off x="7619999" y="2641600"/>
+            <a:ext cx="2603499" cy="266699"/>
           </a:xfrm>
           <a:prstGeom prst="rect">
             <a:avLst/>
@@ -29038,27 +29173,27 @@
               </a:lnSpc>
             </a:pPr>
             <a:r>
-              <a:rPr sz="1100" b="0">
+              <a:rPr sz="1000" b="0">
                 <a:solidFill>
                   <a:srgbClr val="4A5878"/>
                 </a:solidFill>
                 <a:latin typeface="Pretendard Variable"/>
               </a:rPr>
-              <a:t>위험도·경쟁</a:t>
-            </a:r>
-          </a:p>
-        </p:txBody>
-      </p:sp>
-      <p:sp>
-        <p:nvSpPr>
-          <p:cNvPr id="21" name="TextBox 20"/>
-          <p:cNvSpPr txBox="1"/>
-          <p:nvPr/>
-        </p:nvSpPr>
-        <p:spPr>
-          <a:xfrm>
-            <a:off x="10795000" y="2654300"/>
-            <a:ext cx="787400" cy="279400"/>
+              <a:t>위험도·경쟁(점포수·개폐업)</a:t>
+            </a:r>
+          </a:p>
+        </p:txBody>
+      </p:sp>
+      <p:sp>
+        <p:nvSpPr>
+          <p:cNvPr id="24" name="TextBox 23"/>
+          <p:cNvSpPr txBox="1"/>
+          <p:nvPr/>
+        </p:nvSpPr>
+        <p:spPr>
+          <a:xfrm>
+            <a:off x="10287000" y="2641600"/>
+            <a:ext cx="761999" cy="266699"/>
           </a:xfrm>
           <a:prstGeom prst="rect">
             <a:avLst/>
@@ -29077,7 +29212,7 @@
               </a:lnSpc>
             </a:pPr>
             <a:r>
-              <a:rPr sz="1100" b="0">
+              <a:rPr sz="1000" b="0">
                 <a:solidFill>
                   <a:srgbClr val="8A95AE"/>
                 </a:solidFill>
@@ -29090,14 +29225,14 @@
       </p:sp>
       <p:sp>
         <p:nvSpPr>
-          <p:cNvPr id="22" name="Rectangle 21"/>
+          <p:cNvPr id="25" name="Rectangle 24"/>
           <p:cNvSpPr/>
           <p:nvPr/>
         </p:nvSpPr>
         <p:spPr>
           <a:xfrm>
-            <a:off x="609600" y="2997200"/>
-            <a:ext cx="10972800" cy="355599"/>
+            <a:off x="609600" y="2978150"/>
+            <a:ext cx="10972800" cy="342900"/>
           </a:xfrm>
           <a:prstGeom prst="rect">
             <a:avLst/>
@@ -29134,14 +29269,14 @@
       </p:sp>
       <p:sp>
         <p:nvSpPr>
-          <p:cNvPr id="23" name="TextBox 22"/>
-          <p:cNvSpPr txBox="1"/>
-          <p:nvPr/>
-        </p:nvSpPr>
-        <p:spPr>
-          <a:xfrm>
-            <a:off x="609600" y="3035300"/>
-            <a:ext cx="2413000" cy="279400"/>
+          <p:cNvPr id="26" name="TextBox 25"/>
+          <p:cNvSpPr txBox="1"/>
+          <p:nvPr/>
+        </p:nvSpPr>
+        <p:spPr>
+          <a:xfrm>
+            <a:off x="609600" y="3009900"/>
+            <a:ext cx="952499" cy="266699"/>
           </a:xfrm>
           <a:prstGeom prst="rect">
             <a:avLst/>
@@ -29160,27 +29295,27 @@
               </a:lnSpc>
             </a:pPr>
             <a:r>
-              <a:rPr sz="1100" b="1">
+              <a:rPr sz="1000" b="1">
                 <a:solidFill>
                   <a:srgbClr val="0F4C92"/>
                 </a:solidFill>
                 <a:latin typeface="Pretendard Variable"/>
               </a:rPr>
-              <a:t>서울 열린데이터</a:t>
-            </a:r>
-          </a:p>
-        </p:txBody>
-      </p:sp>
-      <p:sp>
-        <p:nvSpPr>
-          <p:cNvPr id="24" name="TextBox 23"/>
-          <p:cNvSpPr txBox="1"/>
-          <p:nvPr/>
-        </p:nvSpPr>
-        <p:spPr>
-          <a:xfrm>
-            <a:off x="3047999" y="3035300"/>
-            <a:ext cx="5588000" cy="279400"/>
+              <a:t>열린데이터광장</a:t>
+            </a:r>
+          </a:p>
+        </p:txBody>
+      </p:sp>
+      <p:sp>
+        <p:nvSpPr>
+          <p:cNvPr id="27" name="TextBox 26"/>
+          <p:cNvSpPr txBox="1"/>
+          <p:nvPr/>
+        </p:nvSpPr>
+        <p:spPr>
+          <a:xfrm>
+            <a:off x="1612900" y="3009900"/>
+            <a:ext cx="4572000" cy="266699"/>
           </a:xfrm>
           <a:prstGeom prst="rect">
             <a:avLst/>
@@ -29199,27 +29334,66 @@
               </a:lnSpc>
             </a:pPr>
             <a:r>
-              <a:rPr sz="1100" b="0">
+              <a:rPr sz="1050" b="0">
+                <a:solidFill>
+                  <a:srgbClr val="0B1A33"/>
+                </a:solidFill>
+                <a:latin typeface="Pretendard Variable"/>
+              </a:rPr>
+              <a:t>서울시 상권분석서비스(길단위인구-상권)</a:t>
+            </a:r>
+          </a:p>
+        </p:txBody>
+      </p:sp>
+      <p:sp>
+        <p:nvSpPr>
+          <p:cNvPr id="28" name="TextBox 27"/>
+          <p:cNvSpPr txBox="1"/>
+          <p:nvPr/>
+        </p:nvSpPr>
+        <p:spPr>
+          <a:xfrm>
+            <a:off x="6286500" y="3009900"/>
+            <a:ext cx="1270000" cy="266699"/>
+          </a:xfrm>
+          <a:prstGeom prst="rect">
+            <a:avLst/>
+          </a:prstGeom>
+          <a:noFill/>
+        </p:spPr>
+        <p:txBody>
+          <a:bodyPr wrap="square" lIns="0" rIns="0" tIns="0" bIns="0" anchor="ctr">
+            <a:spAutoFit/>
+          </a:bodyPr>
+          <a:lstStyle/>
+          <a:p>
+            <a:pPr algn="l">
+              <a:lnSpc>
+                <a:spcPct val="120000"/>
+              </a:lnSpc>
+            </a:pPr>
+            <a:r>
+              <a:rPr sz="1000" b="0">
                 <a:solidFill>
                   <a:srgbClr val="4A5878"/>
                 </a:solidFill>
                 <a:latin typeface="Pretendard Variable"/>
               </a:rPr>
-              <a:t>VwsmTrdarIxQq · 상권변화지표(활성/정체/축소/다이나믹)</a:t>
-            </a:r>
-          </a:p>
-        </p:txBody>
-      </p:sp>
-      <p:sp>
-        <p:nvSpPr>
-          <p:cNvPr id="25" name="TextBox 24"/>
-          <p:cNvSpPr txBox="1"/>
-          <p:nvPr/>
-        </p:nvSpPr>
-        <p:spPr>
-          <a:xfrm>
-            <a:off x="8762999" y="3035300"/>
-            <a:ext cx="1968500" cy="279400"/>
+              <a:t>서울신용보증재단</a:t>
+            </a:r>
+          </a:p>
+        </p:txBody>
+      </p:sp>
+      <p:sp>
+        <p:nvSpPr>
+          <p:cNvPr id="29" name="TextBox 28"/>
+          <p:cNvSpPr txBox="1"/>
+          <p:nvPr/>
+        </p:nvSpPr>
+        <p:spPr>
+          <a:xfrm>
+            <a:off x="7619999" y="3009900"/>
+            <a:ext cx="2603499" cy="266699"/>
           </a:xfrm>
           <a:prstGeom prst="rect">
             <a:avLst/>
@@ -29238,12 +29412,207 @@
               </a:lnSpc>
             </a:pPr>
             <a:r>
-              <a:rPr sz="1100" b="0">
+              <a:rPr sz="1000" b="0">
                 <a:solidFill>
                   <a:srgbClr val="4A5878"/>
                 </a:solidFill>
                 <a:latin typeface="Pretendard Variable"/>
               </a:rPr>
+              <a:t>유동인구 피크·마케팅 타게팅</a:t>
+            </a:r>
+          </a:p>
+        </p:txBody>
+      </p:sp>
+      <p:sp>
+        <p:nvSpPr>
+          <p:cNvPr id="30" name="TextBox 29"/>
+          <p:cNvSpPr txBox="1"/>
+          <p:nvPr/>
+        </p:nvSpPr>
+        <p:spPr>
+          <a:xfrm>
+            <a:off x="10287000" y="3009900"/>
+            <a:ext cx="761999" cy="266699"/>
+          </a:xfrm>
+          <a:prstGeom prst="rect">
+            <a:avLst/>
+          </a:prstGeom>
+          <a:noFill/>
+        </p:spPr>
+        <p:txBody>
+          <a:bodyPr wrap="square" lIns="0" rIns="0" tIns="0" bIns="0" anchor="ctr">
+            <a:spAutoFit/>
+          </a:bodyPr>
+          <a:lstStyle/>
+          <a:p>
+            <a:pPr algn="l">
+              <a:lnSpc>
+                <a:spcPct val="120000"/>
+              </a:lnSpc>
+            </a:pPr>
+            <a:r>
+              <a:rPr sz="1000" b="0">
+                <a:solidFill>
+                  <a:srgbClr val="8A95AE"/>
+                </a:solidFill>
+                <a:latin typeface="Pretendard Variable"/>
+              </a:rPr>
+              <a:t>분기</a:t>
+            </a:r>
+          </a:p>
+        </p:txBody>
+      </p:sp>
+      <p:sp>
+        <p:nvSpPr>
+          <p:cNvPr id="31" name="TextBox 30"/>
+          <p:cNvSpPr txBox="1"/>
+          <p:nvPr/>
+        </p:nvSpPr>
+        <p:spPr>
+          <a:xfrm>
+            <a:off x="609600" y="3378200"/>
+            <a:ext cx="952499" cy="266699"/>
+          </a:xfrm>
+          <a:prstGeom prst="rect">
+            <a:avLst/>
+          </a:prstGeom>
+          <a:noFill/>
+        </p:spPr>
+        <p:txBody>
+          <a:bodyPr wrap="square" lIns="0" rIns="0" tIns="0" bIns="0" anchor="ctr">
+            <a:spAutoFit/>
+          </a:bodyPr>
+          <a:lstStyle/>
+          <a:p>
+            <a:pPr algn="l">
+              <a:lnSpc>
+                <a:spcPct val="120000"/>
+              </a:lnSpc>
+            </a:pPr>
+            <a:r>
+              <a:rPr sz="1000" b="1">
+                <a:solidFill>
+                  <a:srgbClr val="0F4C92"/>
+                </a:solidFill>
+                <a:latin typeface="Pretendard Variable"/>
+              </a:rPr>
+              <a:t>열린데이터광장</a:t>
+            </a:r>
+          </a:p>
+        </p:txBody>
+      </p:sp>
+      <p:sp>
+        <p:nvSpPr>
+          <p:cNvPr id="32" name="TextBox 31"/>
+          <p:cNvSpPr txBox="1"/>
+          <p:nvPr/>
+        </p:nvSpPr>
+        <p:spPr>
+          <a:xfrm>
+            <a:off x="1612900" y="3378200"/>
+            <a:ext cx="4572000" cy="266699"/>
+          </a:xfrm>
+          <a:prstGeom prst="rect">
+            <a:avLst/>
+          </a:prstGeom>
+          <a:noFill/>
+        </p:spPr>
+        <p:txBody>
+          <a:bodyPr wrap="square" lIns="0" rIns="0" tIns="0" bIns="0" anchor="ctr">
+            <a:spAutoFit/>
+          </a:bodyPr>
+          <a:lstStyle/>
+          <a:p>
+            <a:pPr algn="l">
+              <a:lnSpc>
+                <a:spcPct val="120000"/>
+              </a:lnSpc>
+            </a:pPr>
+            <a:r>
+              <a:rPr sz="1050" b="0">
+                <a:solidFill>
+                  <a:srgbClr val="0B1A33"/>
+                </a:solidFill>
+                <a:latin typeface="Pretendard Variable"/>
+              </a:rPr>
+              <a:t>서울시 상권분석서비스(상권변화지표-상권)</a:t>
+            </a:r>
+          </a:p>
+        </p:txBody>
+      </p:sp>
+      <p:sp>
+        <p:nvSpPr>
+          <p:cNvPr id="33" name="TextBox 32"/>
+          <p:cNvSpPr txBox="1"/>
+          <p:nvPr/>
+        </p:nvSpPr>
+        <p:spPr>
+          <a:xfrm>
+            <a:off x="6286500" y="3378200"/>
+            <a:ext cx="1270000" cy="266699"/>
+          </a:xfrm>
+          <a:prstGeom prst="rect">
+            <a:avLst/>
+          </a:prstGeom>
+          <a:noFill/>
+        </p:spPr>
+        <p:txBody>
+          <a:bodyPr wrap="square" lIns="0" rIns="0" tIns="0" bIns="0" anchor="ctr">
+            <a:spAutoFit/>
+          </a:bodyPr>
+          <a:lstStyle/>
+          <a:p>
+            <a:pPr algn="l">
+              <a:lnSpc>
+                <a:spcPct val="120000"/>
+              </a:lnSpc>
+            </a:pPr>
+            <a:r>
+              <a:rPr sz="1000" b="0">
+                <a:solidFill>
+                  <a:srgbClr val="4A5878"/>
+                </a:solidFill>
+                <a:latin typeface="Pretendard Variable"/>
+              </a:rPr>
+              <a:t>서울신용보증재단</a:t>
+            </a:r>
+          </a:p>
+        </p:txBody>
+      </p:sp>
+      <p:sp>
+        <p:nvSpPr>
+          <p:cNvPr id="34" name="TextBox 33"/>
+          <p:cNvSpPr txBox="1"/>
+          <p:nvPr/>
+        </p:nvSpPr>
+        <p:spPr>
+          <a:xfrm>
+            <a:off x="7619999" y="3378200"/>
+            <a:ext cx="2603499" cy="266699"/>
+          </a:xfrm>
+          <a:prstGeom prst="rect">
+            <a:avLst/>
+          </a:prstGeom>
+          <a:noFill/>
+        </p:spPr>
+        <p:txBody>
+          <a:bodyPr wrap="square" lIns="0" rIns="0" tIns="0" bIns="0" anchor="ctr">
+            <a:spAutoFit/>
+          </a:bodyPr>
+          <a:lstStyle/>
+          <a:p>
+            <a:pPr algn="l">
+              <a:lnSpc>
+                <a:spcPct val="120000"/>
+              </a:lnSpc>
+            </a:pPr>
+            <a:r>
+              <a:rPr sz="1000" b="0">
+                <a:solidFill>
+                  <a:srgbClr val="4A5878"/>
+                </a:solidFill>
+                <a:latin typeface="Pretendard Variable"/>
+              </a:rPr>
               <a:t>위험도 2×2 매트릭스</a:t>
             </a:r>
           </a:p>
@@ -29251,14 +29620,14 @@
       </p:sp>
       <p:sp>
         <p:nvSpPr>
-          <p:cNvPr id="26" name="TextBox 25"/>
-          <p:cNvSpPr txBox="1"/>
-          <p:nvPr/>
-        </p:nvSpPr>
-        <p:spPr>
-          <a:xfrm>
-            <a:off x="10795000" y="3035300"/>
-            <a:ext cx="787400" cy="279400"/>
+          <p:cNvPr id="35" name="TextBox 34"/>
+          <p:cNvSpPr txBox="1"/>
+          <p:nvPr/>
+        </p:nvSpPr>
+        <p:spPr>
+          <a:xfrm>
+            <a:off x="10287000" y="3378200"/>
+            <a:ext cx="761999" cy="266699"/>
           </a:xfrm>
           <a:prstGeom prst="rect">
             <a:avLst/>
@@ -29277,7 +29646,7 @@
               </a:lnSpc>
             </a:pPr>
             <a:r>
-              <a:rPr sz="1100" b="0">
+              <a:rPr sz="1000" b="0">
                 <a:solidFill>
                   <a:srgbClr val="8A95AE"/>
                 </a:solidFill>
@@ -29290,170 +29659,14 @@
       </p:sp>
       <p:sp>
         <p:nvSpPr>
-          <p:cNvPr id="27" name="TextBox 26"/>
-          <p:cNvSpPr txBox="1"/>
-          <p:nvPr/>
-        </p:nvSpPr>
-        <p:spPr>
-          <a:xfrm>
-            <a:off x="609600" y="3416299"/>
-            <a:ext cx="2413000" cy="279400"/>
-          </a:xfrm>
-          <a:prstGeom prst="rect">
-            <a:avLst/>
-          </a:prstGeom>
-          <a:noFill/>
-        </p:spPr>
-        <p:txBody>
-          <a:bodyPr wrap="square" lIns="0" rIns="0" tIns="0" bIns="0" anchor="ctr">
-            <a:spAutoFit/>
-          </a:bodyPr>
-          <a:lstStyle/>
-          <a:p>
-            <a:pPr algn="l">
-              <a:lnSpc>
-                <a:spcPct val="120000"/>
-              </a:lnSpc>
-            </a:pPr>
-            <a:r>
-              <a:rPr sz="1100" b="1">
-                <a:solidFill>
-                  <a:srgbClr val="0F4C92"/>
-                </a:solidFill>
-                <a:latin typeface="Pretendard Variable"/>
-              </a:rPr>
-              <a:t>서울 열린데이터</a:t>
-            </a:r>
-          </a:p>
-        </p:txBody>
-      </p:sp>
-      <p:sp>
-        <p:nvSpPr>
-          <p:cNvPr id="28" name="TextBox 27"/>
-          <p:cNvSpPr txBox="1"/>
-          <p:nvPr/>
-        </p:nvSpPr>
-        <p:spPr>
-          <a:xfrm>
-            <a:off x="3047999" y="3416299"/>
-            <a:ext cx="5588000" cy="279400"/>
-          </a:xfrm>
-          <a:prstGeom prst="rect">
-            <a:avLst/>
-          </a:prstGeom>
-          <a:noFill/>
-        </p:spPr>
-        <p:txBody>
-          <a:bodyPr wrap="square" lIns="0" rIns="0" tIns="0" bIns="0" anchor="ctr">
-            <a:spAutoFit/>
-          </a:bodyPr>
-          <a:lstStyle/>
-          <a:p>
-            <a:pPr algn="l">
-              <a:lnSpc>
-                <a:spcPct val="120000"/>
-              </a:lnSpc>
-            </a:pPr>
-            <a:r>
-              <a:rPr sz="1100" b="0">
-                <a:solidFill>
-                  <a:srgbClr val="4A5878"/>
-                </a:solidFill>
-                <a:latin typeface="Pretendard Variable"/>
-              </a:rPr>
-              <a:t>VwsmTrdarFlpopQq · 상권 유동인구(시간대·요일·성·연령)</a:t>
-            </a:r>
-          </a:p>
-        </p:txBody>
-      </p:sp>
-      <p:sp>
-        <p:nvSpPr>
-          <p:cNvPr id="29" name="TextBox 28"/>
-          <p:cNvSpPr txBox="1"/>
-          <p:nvPr/>
-        </p:nvSpPr>
-        <p:spPr>
-          <a:xfrm>
-            <a:off x="8762999" y="3416299"/>
-            <a:ext cx="1968500" cy="279400"/>
-          </a:xfrm>
-          <a:prstGeom prst="rect">
-            <a:avLst/>
-          </a:prstGeom>
-          <a:noFill/>
-        </p:spPr>
-        <p:txBody>
-          <a:bodyPr wrap="square" lIns="0" rIns="0" tIns="0" bIns="0" anchor="ctr">
-            <a:spAutoFit/>
-          </a:bodyPr>
-          <a:lstStyle/>
-          <a:p>
-            <a:pPr algn="l">
-              <a:lnSpc>
-                <a:spcPct val="120000"/>
-              </a:lnSpc>
-            </a:pPr>
-            <a:r>
-              <a:rPr sz="1100" b="0">
-                <a:solidFill>
-                  <a:srgbClr val="4A5878"/>
-                </a:solidFill>
-                <a:latin typeface="Pretendard Variable"/>
-              </a:rPr>
-              <a:t>마케팅 피크 타게팅</a:t>
-            </a:r>
-          </a:p>
-        </p:txBody>
-      </p:sp>
-      <p:sp>
-        <p:nvSpPr>
-          <p:cNvPr id="30" name="TextBox 29"/>
-          <p:cNvSpPr txBox="1"/>
-          <p:nvPr/>
-        </p:nvSpPr>
-        <p:spPr>
-          <a:xfrm>
-            <a:off x="10795000" y="3416299"/>
-            <a:ext cx="787400" cy="279400"/>
-          </a:xfrm>
-          <a:prstGeom prst="rect">
-            <a:avLst/>
-          </a:prstGeom>
-          <a:noFill/>
-        </p:spPr>
-        <p:txBody>
-          <a:bodyPr wrap="square" lIns="0" rIns="0" tIns="0" bIns="0" anchor="ctr">
-            <a:spAutoFit/>
-          </a:bodyPr>
-          <a:lstStyle/>
-          <a:p>
-            <a:pPr algn="l">
-              <a:lnSpc>
-                <a:spcPct val="120000"/>
-              </a:lnSpc>
-            </a:pPr>
-            <a:r>
-              <a:rPr sz="1100" b="0">
-                <a:solidFill>
-                  <a:srgbClr val="8A95AE"/>
-                </a:solidFill>
-                <a:latin typeface="Pretendard Variable"/>
-              </a:rPr>
-              <a:t>분기</a:t>
-            </a:r>
-          </a:p>
-        </p:txBody>
-      </p:sp>
-      <p:sp>
-        <p:nvSpPr>
-          <p:cNvPr id="31" name="Rectangle 30"/>
+          <p:cNvPr id="36" name="Rectangle 35"/>
           <p:cNvSpPr/>
           <p:nvPr/>
         </p:nvSpPr>
         <p:spPr>
           <a:xfrm>
-            <a:off x="609600" y="3759199"/>
-            <a:ext cx="10972800" cy="355599"/>
+            <a:off x="609600" y="3714750"/>
+            <a:ext cx="10972800" cy="342900"/>
           </a:xfrm>
           <a:prstGeom prst="rect">
             <a:avLst/>
@@ -29490,14 +29703,14 @@
       </p:sp>
       <p:sp>
         <p:nvSpPr>
-          <p:cNvPr id="32" name="TextBox 31"/>
-          <p:cNvSpPr txBox="1"/>
-          <p:nvPr/>
-        </p:nvSpPr>
-        <p:spPr>
-          <a:xfrm>
-            <a:off x="609600" y="3797300"/>
-            <a:ext cx="2413000" cy="279400"/>
+          <p:cNvPr id="37" name="TextBox 36"/>
+          <p:cNvSpPr txBox="1"/>
+          <p:nvPr/>
+        </p:nvSpPr>
+        <p:spPr>
+          <a:xfrm>
+            <a:off x="609600" y="3746500"/>
+            <a:ext cx="952499" cy="266699"/>
           </a:xfrm>
           <a:prstGeom prst="rect">
             <a:avLst/>
@@ -29516,27 +29729,27 @@
               </a:lnSpc>
             </a:pPr>
             <a:r>
-              <a:rPr sz="1100" b="1">
+              <a:rPr sz="1000" b="1">
                 <a:solidFill>
                   <a:srgbClr val="0F4C92"/>
                 </a:solidFill>
                 <a:latin typeface="Pretendard Variable"/>
               </a:rPr>
-              <a:t>서울 열린데이터</a:t>
-            </a:r>
-          </a:p>
-        </p:txBody>
-      </p:sp>
-      <p:sp>
-        <p:nvSpPr>
-          <p:cNvPr id="33" name="TextBox 32"/>
-          <p:cNvSpPr txBox="1"/>
-          <p:nvPr/>
-        </p:nvSpPr>
-        <p:spPr>
-          <a:xfrm>
-            <a:off x="3047999" y="3797300"/>
-            <a:ext cx="5588000" cy="279400"/>
+              <a:t>열린데이터광장</a:t>
+            </a:r>
+          </a:p>
+        </p:txBody>
+      </p:sp>
+      <p:sp>
+        <p:nvSpPr>
+          <p:cNvPr id="38" name="TextBox 37"/>
+          <p:cNvSpPr txBox="1"/>
+          <p:nvPr/>
+        </p:nvSpPr>
+        <p:spPr>
+          <a:xfrm>
+            <a:off x="1612900" y="3746500"/>
+            <a:ext cx="4572000" cy="266699"/>
           </a:xfrm>
           <a:prstGeom prst="rect">
             <a:avLst/>
@@ -29555,27 +29768,66 @@
               </a:lnSpc>
             </a:pPr>
             <a:r>
-              <a:rPr sz="1100" b="0">
+              <a:rPr sz="1050" b="0">
+                <a:solidFill>
+                  <a:srgbClr val="0B1A33"/>
+                </a:solidFill>
+                <a:latin typeface="Pretendard Variable"/>
+              </a:rPr>
+              <a:t>서울시 상권분석서비스(직장인구-상권)</a:t>
+            </a:r>
+          </a:p>
+        </p:txBody>
+      </p:sp>
+      <p:sp>
+        <p:nvSpPr>
+          <p:cNvPr id="39" name="TextBox 38"/>
+          <p:cNvSpPr txBox="1"/>
+          <p:nvPr/>
+        </p:nvSpPr>
+        <p:spPr>
+          <a:xfrm>
+            <a:off x="6286500" y="3746500"/>
+            <a:ext cx="1270000" cy="266699"/>
+          </a:xfrm>
+          <a:prstGeom prst="rect">
+            <a:avLst/>
+          </a:prstGeom>
+          <a:noFill/>
+        </p:spPr>
+        <p:txBody>
+          <a:bodyPr wrap="square" lIns="0" rIns="0" tIns="0" bIns="0" anchor="ctr">
+            <a:spAutoFit/>
+          </a:bodyPr>
+          <a:lstStyle/>
+          <a:p>
+            <a:pPr algn="l">
+              <a:lnSpc>
+                <a:spcPct val="120000"/>
+              </a:lnSpc>
+            </a:pPr>
+            <a:r>
+              <a:rPr sz="1000" b="0">
                 <a:solidFill>
                   <a:srgbClr val="4A5878"/>
                 </a:solidFill>
                 <a:latin typeface="Pretendard Variable"/>
               </a:rPr>
-              <a:t>SPOP_LOCAL_RESD_DONG · 행정동 생활인구(거주)</a:t>
-            </a:r>
-          </a:p>
-        </p:txBody>
-      </p:sp>
-      <p:sp>
-        <p:nvSpPr>
-          <p:cNvPr id="34" name="TextBox 33"/>
-          <p:cNvSpPr txBox="1"/>
-          <p:nvPr/>
-        </p:nvSpPr>
-        <p:spPr>
-          <a:xfrm>
-            <a:off x="8762999" y="3797300"/>
-            <a:ext cx="1968500" cy="279400"/>
+              <a:t>서울신용보증재단</a:t>
+            </a:r>
+          </a:p>
+        </p:txBody>
+      </p:sp>
+      <p:sp>
+        <p:nvSpPr>
+          <p:cNvPr id="40" name="TextBox 39"/>
+          <p:cNvSpPr txBox="1"/>
+          <p:nvPr/>
+        </p:nvSpPr>
+        <p:spPr>
+          <a:xfrm>
+            <a:off x="7619999" y="3746500"/>
+            <a:ext cx="2603499" cy="266699"/>
           </a:xfrm>
           <a:prstGeom prst="rect">
             <a:avLst/>
@@ -29594,27 +29846,27 @@
               </a:lnSpc>
             </a:pPr>
             <a:r>
-              <a:rPr sz="1100" b="0">
+              <a:rPr sz="1000" b="0">
                 <a:solidFill>
                   <a:srgbClr val="4A5878"/>
                 </a:solidFill>
                 <a:latin typeface="Pretendard Variable"/>
               </a:rPr>
-              <a:t>5차원 입지 분석</a:t>
-            </a:r>
-          </a:p>
-        </p:txBody>
-      </p:sp>
-      <p:sp>
-        <p:nvSpPr>
-          <p:cNvPr id="35" name="TextBox 34"/>
-          <p:cNvSpPr txBox="1"/>
-          <p:nvPr/>
-        </p:nvSpPr>
-        <p:spPr>
-          <a:xfrm>
-            <a:off x="10795000" y="3797300"/>
-            <a:ext cx="787400" cy="279400"/>
+              <a:t>5차원 입지 — 직주비율</a:t>
+            </a:r>
+          </a:p>
+        </p:txBody>
+      </p:sp>
+      <p:sp>
+        <p:nvSpPr>
+          <p:cNvPr id="41" name="TextBox 40"/>
+          <p:cNvSpPr txBox="1"/>
+          <p:nvPr/>
+        </p:nvSpPr>
+        <p:spPr>
+          <a:xfrm>
+            <a:off x="10287000" y="3746500"/>
+            <a:ext cx="761999" cy="266699"/>
           </a:xfrm>
           <a:prstGeom prst="rect">
             <a:avLst/>
@@ -29633,27 +29885,27 @@
               </a:lnSpc>
             </a:pPr>
             <a:r>
-              <a:rPr sz="1100" b="0">
+              <a:rPr sz="1000" b="0">
                 <a:solidFill>
                   <a:srgbClr val="8A95AE"/>
                 </a:solidFill>
                 <a:latin typeface="Pretendard Variable"/>
               </a:rPr>
-              <a:t>일</a:t>
-            </a:r>
-          </a:p>
-        </p:txBody>
-      </p:sp>
-      <p:sp>
-        <p:nvSpPr>
-          <p:cNvPr id="36" name="TextBox 35"/>
-          <p:cNvSpPr txBox="1"/>
-          <p:nvPr/>
-        </p:nvSpPr>
-        <p:spPr>
-          <a:xfrm>
-            <a:off x="609600" y="4178299"/>
-            <a:ext cx="2413000" cy="279400"/>
+              <a:t>분기</a:t>
+            </a:r>
+          </a:p>
+        </p:txBody>
+      </p:sp>
+      <p:sp>
+        <p:nvSpPr>
+          <p:cNvPr id="42" name="TextBox 41"/>
+          <p:cNvSpPr txBox="1"/>
+          <p:nvPr/>
+        </p:nvSpPr>
+        <p:spPr>
+          <a:xfrm>
+            <a:off x="609600" y="4114800"/>
+            <a:ext cx="952499" cy="266699"/>
           </a:xfrm>
           <a:prstGeom prst="rect">
             <a:avLst/>
@@ -29672,27 +29924,27 @@
               </a:lnSpc>
             </a:pPr>
             <a:r>
-              <a:rPr sz="1100" b="1">
+              <a:rPr sz="1000" b="1">
                 <a:solidFill>
                   <a:srgbClr val="0F4C92"/>
                 </a:solidFill>
                 <a:latin typeface="Pretendard Variable"/>
               </a:rPr>
-              <a:t>서울 열린데이터</a:t>
-            </a:r>
-          </a:p>
-        </p:txBody>
-      </p:sp>
-      <p:sp>
-        <p:nvSpPr>
-          <p:cNvPr id="37" name="TextBox 36"/>
-          <p:cNvSpPr txBox="1"/>
-          <p:nvPr/>
-        </p:nvSpPr>
-        <p:spPr>
-          <a:xfrm>
-            <a:off x="3047999" y="4178299"/>
-            <a:ext cx="5588000" cy="279400"/>
+              <a:t>열린데이터광장</a:t>
+            </a:r>
+          </a:p>
+        </p:txBody>
+      </p:sp>
+      <p:sp>
+        <p:nvSpPr>
+          <p:cNvPr id="43" name="TextBox 42"/>
+          <p:cNvSpPr txBox="1"/>
+          <p:nvPr/>
+        </p:nvSpPr>
+        <p:spPr>
+          <a:xfrm>
+            <a:off x="1612900" y="4114800"/>
+            <a:ext cx="4572000" cy="266699"/>
           </a:xfrm>
           <a:prstGeom prst="rect">
             <a:avLst/>
@@ -29711,27 +29963,66 @@
               </a:lnSpc>
             </a:pPr>
             <a:r>
-              <a:rPr sz="1100" b="0">
+              <a:rPr sz="1050" b="0">
+                <a:solidFill>
+                  <a:srgbClr val="0B1A33"/>
+                </a:solidFill>
+                <a:latin typeface="Pretendard Variable"/>
+              </a:rPr>
+              <a:t>서울시 상권분석서비스(영역-상권)</a:t>
+            </a:r>
+          </a:p>
+        </p:txBody>
+      </p:sp>
+      <p:sp>
+        <p:nvSpPr>
+          <p:cNvPr id="44" name="TextBox 43"/>
+          <p:cNvSpPr txBox="1"/>
+          <p:nvPr/>
+        </p:nvSpPr>
+        <p:spPr>
+          <a:xfrm>
+            <a:off x="6286500" y="4114800"/>
+            <a:ext cx="1270000" cy="266699"/>
+          </a:xfrm>
+          <a:prstGeom prst="rect">
+            <a:avLst/>
+          </a:prstGeom>
+          <a:noFill/>
+        </p:spPr>
+        <p:txBody>
+          <a:bodyPr wrap="square" lIns="0" rIns="0" tIns="0" bIns="0" anchor="ctr">
+            <a:spAutoFit/>
+          </a:bodyPr>
+          <a:lstStyle/>
+          <a:p>
+            <a:pPr algn="l">
+              <a:lnSpc>
+                <a:spcPct val="120000"/>
+              </a:lnSpc>
+            </a:pPr>
+            <a:r>
+              <a:rPr sz="1000" b="0">
                 <a:solidFill>
                   <a:srgbClr val="4A5878"/>
                 </a:solidFill>
                 <a:latin typeface="Pretendard Variable"/>
               </a:rPr>
-              <a:t>TbgisTrdarRelm · 상권영역-행정동 매핑</a:t>
-            </a:r>
-          </a:p>
-        </p:txBody>
-      </p:sp>
-      <p:sp>
-        <p:nvSpPr>
-          <p:cNvPr id="38" name="TextBox 37"/>
-          <p:cNvSpPr txBox="1"/>
-          <p:nvPr/>
-        </p:nvSpPr>
-        <p:spPr>
-          <a:xfrm>
-            <a:off x="8762999" y="4178299"/>
-            <a:ext cx="1968500" cy="279400"/>
+              <a:t>서울신용보증재단</a:t>
+            </a:r>
+          </a:p>
+        </p:txBody>
+      </p:sp>
+      <p:sp>
+        <p:nvSpPr>
+          <p:cNvPr id="45" name="TextBox 44"/>
+          <p:cNvSpPr txBox="1"/>
+          <p:nvPr/>
+        </p:nvSpPr>
+        <p:spPr>
+          <a:xfrm>
+            <a:off x="7619999" y="4114800"/>
+            <a:ext cx="2603499" cy="266699"/>
           </a:xfrm>
           <a:prstGeom prst="rect">
             <a:avLst/>
@@ -29750,27 +30041,27 @@
               </a:lnSpc>
             </a:pPr>
             <a:r>
-              <a:rPr sz="1100" b="0">
+              <a:rPr sz="1000" b="0">
                 <a:solidFill>
                   <a:srgbClr val="4A5878"/>
                 </a:solidFill>
                 <a:latin typeface="Pretendard Variable"/>
               </a:rPr>
-              <a:t>지역 필터링(전 기능)</a:t>
-            </a:r>
-          </a:p>
-        </p:txBody>
-      </p:sp>
-      <p:sp>
-        <p:nvSpPr>
-          <p:cNvPr id="39" name="TextBox 38"/>
-          <p:cNvSpPr txBox="1"/>
-          <p:nvPr/>
-        </p:nvSpPr>
-        <p:spPr>
-          <a:xfrm>
-            <a:off x="10795000" y="4178299"/>
-            <a:ext cx="787400" cy="279400"/>
+              <a:t>상권↔행정동 매핑(전 기능)</a:t>
+            </a:r>
+          </a:p>
+        </p:txBody>
+      </p:sp>
+      <p:sp>
+        <p:nvSpPr>
+          <p:cNvPr id="46" name="TextBox 45"/>
+          <p:cNvSpPr txBox="1"/>
+          <p:nvPr/>
+        </p:nvSpPr>
+        <p:spPr>
+          <a:xfrm>
+            <a:off x="10287000" y="4114800"/>
+            <a:ext cx="761999" cy="266699"/>
           </a:xfrm>
           <a:prstGeom prst="rect">
             <a:avLst/>
@@ -29789,27 +30080,27 @@
               </a:lnSpc>
             </a:pPr>
             <a:r>
-              <a:rPr sz="1100" b="0">
+              <a:rPr sz="1000" b="0">
                 <a:solidFill>
                   <a:srgbClr val="8A95AE"/>
                 </a:solidFill>
                 <a:latin typeface="Pretendard Variable"/>
               </a:rPr>
-              <a:t>정적</a:t>
-            </a:r>
-          </a:p>
-        </p:txBody>
-      </p:sp>
-      <p:sp>
-        <p:nvSpPr>
-          <p:cNvPr id="40" name="Rectangle 39"/>
+              <a:t>수시</a:t>
+            </a:r>
+          </a:p>
+        </p:txBody>
+      </p:sp>
+      <p:sp>
+        <p:nvSpPr>
+          <p:cNvPr id="47" name="Rectangle 46"/>
           <p:cNvSpPr/>
           <p:nvPr/>
         </p:nvSpPr>
         <p:spPr>
           <a:xfrm>
-            <a:off x="609600" y="4521199"/>
-            <a:ext cx="10972800" cy="355599"/>
+            <a:off x="609600" y="4451350"/>
+            <a:ext cx="10972800" cy="342900"/>
           </a:xfrm>
           <a:prstGeom prst="rect">
             <a:avLst/>
@@ -29846,14 +30137,14 @@
       </p:sp>
       <p:sp>
         <p:nvSpPr>
-          <p:cNvPr id="41" name="TextBox 40"/>
-          <p:cNvSpPr txBox="1"/>
-          <p:nvPr/>
-        </p:nvSpPr>
-        <p:spPr>
-          <a:xfrm>
-            <a:off x="609600" y="4559300"/>
-            <a:ext cx="2413000" cy="279400"/>
+          <p:cNvPr id="48" name="TextBox 47"/>
+          <p:cNvSpPr txBox="1"/>
+          <p:nvPr/>
+        </p:nvSpPr>
+        <p:spPr>
+          <a:xfrm>
+            <a:off x="609600" y="4483100"/>
+            <a:ext cx="952499" cy="266699"/>
           </a:xfrm>
           <a:prstGeom prst="rect">
             <a:avLst/>
@@ -29872,27 +30163,27 @@
               </a:lnSpc>
             </a:pPr>
             <a:r>
-              <a:rPr sz="1100" b="1">
+              <a:rPr sz="1000" b="1">
                 <a:solidFill>
                   <a:srgbClr val="0F4C92"/>
                 </a:solidFill>
                 <a:latin typeface="Pretendard Variable"/>
               </a:rPr>
-              <a:t>서울 열린데이터</a:t>
-            </a:r>
-          </a:p>
-        </p:txBody>
-      </p:sp>
-      <p:sp>
-        <p:nvSpPr>
-          <p:cNvPr id="42" name="TextBox 41"/>
-          <p:cNvSpPr txBox="1"/>
-          <p:nvPr/>
-        </p:nvSpPr>
-        <p:spPr>
-          <a:xfrm>
-            <a:off x="3047999" y="4559300"/>
-            <a:ext cx="5588000" cy="279400"/>
+              <a:t>열린데이터광장</a:t>
+            </a:r>
+          </a:p>
+        </p:txBody>
+      </p:sp>
+      <p:sp>
+        <p:nvSpPr>
+          <p:cNvPr id="49" name="TextBox 48"/>
+          <p:cNvSpPr txBox="1"/>
+          <p:nvPr/>
+        </p:nvSpPr>
+        <p:spPr>
+          <a:xfrm>
+            <a:off x="1612900" y="4483100"/>
+            <a:ext cx="4572000" cy="266699"/>
           </a:xfrm>
           <a:prstGeom prst="rect">
             <a:avLst/>
@@ -29911,27 +30202,66 @@
               </a:lnSpc>
             </a:pPr>
             <a:r>
-              <a:rPr sz="1100" b="0">
+              <a:rPr sz="1050" b="0">
+                <a:solidFill>
+                  <a:srgbClr val="0B1A33"/>
+                </a:solidFill>
+                <a:latin typeface="Pretendard Variable"/>
+              </a:rPr>
+              <a:t>서울시 문화행사 정보</a:t>
+            </a:r>
+          </a:p>
+        </p:txBody>
+      </p:sp>
+      <p:sp>
+        <p:nvSpPr>
+          <p:cNvPr id="50" name="TextBox 49"/>
+          <p:cNvSpPr txBox="1"/>
+          <p:nvPr/>
+        </p:nvSpPr>
+        <p:spPr>
+          <a:xfrm>
+            <a:off x="6286500" y="4483100"/>
+            <a:ext cx="1270000" cy="266699"/>
+          </a:xfrm>
+          <a:prstGeom prst="rect">
+            <a:avLst/>
+          </a:prstGeom>
+          <a:noFill/>
+        </p:spPr>
+        <p:txBody>
+          <a:bodyPr wrap="square" lIns="0" rIns="0" tIns="0" bIns="0" anchor="ctr">
+            <a:spAutoFit/>
+          </a:bodyPr>
+          <a:lstStyle/>
+          <a:p>
+            <a:pPr algn="l">
+              <a:lnSpc>
+                <a:spcPct val="120000"/>
+              </a:lnSpc>
+            </a:pPr>
+            <a:r>
+              <a:rPr sz="1000" b="0">
                 <a:solidFill>
                   <a:srgbClr val="4A5878"/>
                 </a:solidFill>
                 <a:latin typeface="Pretendard Variable"/>
               </a:rPr>
-              <a:t>culturalEventInfo · 서울 문화행사 정보</a:t>
-            </a:r>
-          </a:p>
-        </p:txBody>
-      </p:sp>
-      <p:sp>
-        <p:nvSpPr>
-          <p:cNvPr id="43" name="TextBox 42"/>
-          <p:cNvSpPr txBox="1"/>
-          <p:nvPr/>
-        </p:nvSpPr>
-        <p:spPr>
-          <a:xfrm>
-            <a:off x="8762999" y="4559300"/>
-            <a:ext cx="1968500" cy="279400"/>
+              <a:t>서울특별시</a:t>
+            </a:r>
+          </a:p>
+        </p:txBody>
+      </p:sp>
+      <p:sp>
+        <p:nvSpPr>
+          <p:cNvPr id="51" name="TextBox 50"/>
+          <p:cNvSpPr txBox="1"/>
+          <p:nvPr/>
+        </p:nvSpPr>
+        <p:spPr>
+          <a:xfrm>
+            <a:off x="7619999" y="4483100"/>
+            <a:ext cx="2603499" cy="266699"/>
           </a:xfrm>
           <a:prstGeom prst="rect">
             <a:avLst/>
@@ -29950,27 +30280,27 @@
               </a:lnSpc>
             </a:pPr>
             <a:r>
-              <a:rPr sz="1100" b="0">
+              <a:rPr sz="1000" b="0">
                 <a:solidFill>
                   <a:srgbClr val="4A5878"/>
                 </a:solidFill>
                 <a:latin typeface="Pretendard Variable"/>
               </a:rPr>
-              <a:t>이벤트 알림·메뉴 시즌</a:t>
-            </a:r>
-          </a:p>
-        </p:txBody>
-      </p:sp>
-      <p:sp>
-        <p:nvSpPr>
-          <p:cNvPr id="44" name="TextBox 43"/>
-          <p:cNvSpPr txBox="1"/>
-          <p:nvPr/>
-        </p:nvSpPr>
-        <p:spPr>
-          <a:xfrm>
-            <a:off x="10795000" y="4559300"/>
-            <a:ext cx="787400" cy="279400"/>
+              <a:t>문화행사 알림·메뉴 시즌</a:t>
+            </a:r>
+          </a:p>
+        </p:txBody>
+      </p:sp>
+      <p:sp>
+        <p:nvSpPr>
+          <p:cNvPr id="52" name="TextBox 51"/>
+          <p:cNvSpPr txBox="1"/>
+          <p:nvPr/>
+        </p:nvSpPr>
+        <p:spPr>
+          <a:xfrm>
+            <a:off x="10287000" y="4483100"/>
+            <a:ext cx="761999" cy="266699"/>
           </a:xfrm>
           <a:prstGeom prst="rect">
             <a:avLst/>
@@ -29989,7 +30319,7 @@
               </a:lnSpc>
             </a:pPr>
             <a:r>
-              <a:rPr sz="1100" b="0">
+              <a:rPr sz="1000" b="0">
                 <a:solidFill>
                   <a:srgbClr val="8A95AE"/>
                 </a:solidFill>
@@ -30002,14 +30332,14 @@
       </p:sp>
       <p:sp>
         <p:nvSpPr>
-          <p:cNvPr id="45" name="TextBox 44"/>
-          <p:cNvSpPr txBox="1"/>
-          <p:nvPr/>
-        </p:nvSpPr>
-        <p:spPr>
-          <a:xfrm>
-            <a:off x="609600" y="4940300"/>
-            <a:ext cx="2413000" cy="279400"/>
+          <p:cNvPr id="53" name="TextBox 52"/>
+          <p:cNvSpPr txBox="1"/>
+          <p:nvPr/>
+        </p:nvSpPr>
+        <p:spPr>
+          <a:xfrm>
+            <a:off x="609600" y="4851400"/>
+            <a:ext cx="952499" cy="266699"/>
           </a:xfrm>
           <a:prstGeom prst="rect">
             <a:avLst/>
@@ -30028,27 +30358,27 @@
               </a:lnSpc>
             </a:pPr>
             <a:r>
-              <a:rPr sz="1100" b="1">
+              <a:rPr sz="1000" b="1">
                 <a:solidFill>
                   <a:srgbClr val="0F4C92"/>
                 </a:solidFill>
                 <a:latin typeface="Pretendard Variable"/>
               </a:rPr>
-              <a:t>서울 열린데이터</a:t>
-            </a:r>
-          </a:p>
-        </p:txBody>
-      </p:sp>
-      <p:sp>
-        <p:nvSpPr>
-          <p:cNvPr id="46" name="TextBox 45"/>
-          <p:cNvSpPr txBox="1"/>
-          <p:nvPr/>
-        </p:nvSpPr>
-        <p:spPr>
-          <a:xfrm>
-            <a:off x="3047999" y="4940300"/>
-            <a:ext cx="5588000" cy="279400"/>
+              <a:t>열린데이터광장</a:t>
+            </a:r>
+          </a:p>
+        </p:txBody>
+      </p:sp>
+      <p:sp>
+        <p:nvSpPr>
+          <p:cNvPr id="54" name="TextBox 53"/>
+          <p:cNvSpPr txBox="1"/>
+          <p:nvPr/>
+        </p:nvSpPr>
+        <p:spPr>
+          <a:xfrm>
+            <a:off x="1612900" y="4851400"/>
+            <a:ext cx="4572000" cy="266699"/>
           </a:xfrm>
           <a:prstGeom prst="rect">
             <a:avLst/>
@@ -30067,27 +30397,66 @@
               </a:lnSpc>
             </a:pPr>
             <a:r>
-              <a:rPr sz="1100" b="0">
+              <a:rPr sz="1050" b="0">
+                <a:solidFill>
+                  <a:srgbClr val="0B1A33"/>
+                </a:solidFill>
+                <a:latin typeface="Pretendard Variable"/>
+              </a:rPr>
+              <a:t>행정동 단위 서울 생활인구(내국인)</a:t>
+            </a:r>
+          </a:p>
+        </p:txBody>
+      </p:sp>
+      <p:sp>
+        <p:nvSpPr>
+          <p:cNvPr id="55" name="TextBox 54"/>
+          <p:cNvSpPr txBox="1"/>
+          <p:nvPr/>
+        </p:nvSpPr>
+        <p:spPr>
+          <a:xfrm>
+            <a:off x="6286500" y="4851400"/>
+            <a:ext cx="1270000" cy="266699"/>
+          </a:xfrm>
+          <a:prstGeom prst="rect">
+            <a:avLst/>
+          </a:prstGeom>
+          <a:noFill/>
+        </p:spPr>
+        <p:txBody>
+          <a:bodyPr wrap="square" lIns="0" rIns="0" tIns="0" bIns="0" anchor="ctr">
+            <a:spAutoFit/>
+          </a:bodyPr>
+          <a:lstStyle/>
+          <a:p>
+            <a:pPr algn="l">
+              <a:lnSpc>
+                <a:spcPct val="120000"/>
+              </a:lnSpc>
+            </a:pPr>
+            <a:r>
+              <a:rPr sz="1000" b="0">
                 <a:solidFill>
                   <a:srgbClr val="4A5878"/>
                 </a:solidFill>
                 <a:latin typeface="Pretendard Variable"/>
               </a:rPr>
-              <a:t>VwsmTrdarWrcPopltnQq · 상권 직장인구</a:t>
-            </a:r>
-          </a:p>
-        </p:txBody>
-      </p:sp>
-      <p:sp>
-        <p:nvSpPr>
-          <p:cNvPr id="47" name="TextBox 46"/>
-          <p:cNvSpPr txBox="1"/>
-          <p:nvPr/>
-        </p:nvSpPr>
-        <p:spPr>
-          <a:xfrm>
-            <a:off x="8762999" y="4940300"/>
-            <a:ext cx="1968500" cy="279400"/>
+              <a:t>서울특별시</a:t>
+            </a:r>
+          </a:p>
+        </p:txBody>
+      </p:sp>
+      <p:sp>
+        <p:nvSpPr>
+          <p:cNvPr id="56" name="TextBox 55"/>
+          <p:cNvSpPr txBox="1"/>
+          <p:nvPr/>
+        </p:nvSpPr>
+        <p:spPr>
+          <a:xfrm>
+            <a:off x="7619999" y="4851400"/>
+            <a:ext cx="2603499" cy="266699"/>
           </a:xfrm>
           <a:prstGeom prst="rect">
             <a:avLst/>
@@ -30106,27 +30475,27 @@
               </a:lnSpc>
             </a:pPr>
             <a:r>
-              <a:rPr sz="1100" b="0">
+              <a:rPr sz="1000" b="0">
                 <a:solidFill>
                   <a:srgbClr val="4A5878"/>
                 </a:solidFill>
                 <a:latin typeface="Pretendard Variable"/>
               </a:rPr>
-              <a:t>직주비율 산출</a:t>
-            </a:r>
-          </a:p>
-        </p:txBody>
-      </p:sp>
-      <p:sp>
-        <p:nvSpPr>
-          <p:cNvPr id="48" name="TextBox 47"/>
-          <p:cNvSpPr txBox="1"/>
-          <p:nvPr/>
-        </p:nvSpPr>
-        <p:spPr>
-          <a:xfrm>
-            <a:off x="10795000" y="4940300"/>
-            <a:ext cx="787400" cy="279400"/>
+              <a:t>5차원 입지·쿠폰 피크타임</a:t>
+            </a:r>
+          </a:p>
+        </p:txBody>
+      </p:sp>
+      <p:sp>
+        <p:nvSpPr>
+          <p:cNvPr id="57" name="TextBox 56"/>
+          <p:cNvSpPr txBox="1"/>
+          <p:nvPr/>
+        </p:nvSpPr>
+        <p:spPr>
+          <a:xfrm>
+            <a:off x="10287000" y="4851400"/>
+            <a:ext cx="761999" cy="266699"/>
           </a:xfrm>
           <a:prstGeom prst="rect">
             <a:avLst/>
@@ -30145,27 +30514,27 @@
               </a:lnSpc>
             </a:pPr>
             <a:r>
-              <a:rPr sz="1100" b="0">
+              <a:rPr sz="1000" b="0">
                 <a:solidFill>
                   <a:srgbClr val="8A95AE"/>
                 </a:solidFill>
                 <a:latin typeface="Pretendard Variable"/>
               </a:rPr>
-              <a:t>분기</a:t>
-            </a:r>
-          </a:p>
-        </p:txBody>
-      </p:sp>
-      <p:sp>
-        <p:nvSpPr>
-          <p:cNvPr id="49" name="Rectangle 48"/>
+              <a:t>일</a:t>
+            </a:r>
+          </a:p>
+        </p:txBody>
+      </p:sp>
+      <p:sp>
+        <p:nvSpPr>
+          <p:cNvPr id="58" name="Rectangle 57"/>
           <p:cNvSpPr/>
           <p:nvPr/>
         </p:nvSpPr>
         <p:spPr>
           <a:xfrm>
-            <a:off x="609600" y="5283200"/>
-            <a:ext cx="10972800" cy="355599"/>
+            <a:off x="609600" y="5187950"/>
+            <a:ext cx="10972800" cy="342900"/>
           </a:xfrm>
           <a:prstGeom prst="rect">
             <a:avLst/>
@@ -30202,14 +30571,14 @@
       </p:sp>
       <p:sp>
         <p:nvSpPr>
-          <p:cNvPr id="50" name="TextBox 49"/>
-          <p:cNvSpPr txBox="1"/>
-          <p:nvPr/>
-        </p:nvSpPr>
-        <p:spPr>
-          <a:xfrm>
-            <a:off x="609600" y="5321299"/>
-            <a:ext cx="2413000" cy="279400"/>
+          <p:cNvPr id="59" name="TextBox 58"/>
+          <p:cNvSpPr txBox="1"/>
+          <p:nvPr/>
+        </p:nvSpPr>
+        <p:spPr>
+          <a:xfrm>
+            <a:off x="609600" y="5219700"/>
+            <a:ext cx="952499" cy="266699"/>
           </a:xfrm>
           <a:prstGeom prst="rect">
             <a:avLst/>
@@ -30228,7 +30597,7 @@
               </a:lnSpc>
             </a:pPr>
             <a:r>
-              <a:rPr sz="1100" b="1">
+              <a:rPr sz="1000" b="1">
                 <a:solidFill>
                   <a:srgbClr val="8A95AE"/>
                 </a:solidFill>
@@ -30241,14 +30610,14 @@
       </p:sp>
       <p:sp>
         <p:nvSpPr>
-          <p:cNvPr id="51" name="TextBox 50"/>
-          <p:cNvSpPr txBox="1"/>
-          <p:nvPr/>
-        </p:nvSpPr>
-        <p:spPr>
-          <a:xfrm>
-            <a:off x="3047999" y="5321299"/>
-            <a:ext cx="5588000" cy="279400"/>
+          <p:cNvPr id="60" name="TextBox 59"/>
+          <p:cNvSpPr txBox="1"/>
+          <p:nvPr/>
+        </p:nvSpPr>
+        <p:spPr>
+          <a:xfrm>
+            <a:off x="1612900" y="5219700"/>
+            <a:ext cx="4572000" cy="266699"/>
           </a:xfrm>
           <a:prstGeom prst="rect">
             <a:avLst/>
@@ -30267,27 +30636,66 @@
               </a:lnSpc>
             </a:pPr>
             <a:r>
-              <a:rPr sz="1100" b="0">
+              <a:rPr sz="1050" b="0">
+                <a:solidFill>
+                  <a:srgbClr val="0B1A33"/>
+                </a:solidFill>
+                <a:latin typeface="Pretendard Variable"/>
+              </a:rPr>
+              <a:t>국세청_사업자등록정보 진위확인 및 상태조회 서비스</a:t>
+            </a:r>
+          </a:p>
+        </p:txBody>
+      </p:sp>
+      <p:sp>
+        <p:nvSpPr>
+          <p:cNvPr id="61" name="TextBox 60"/>
+          <p:cNvSpPr txBox="1"/>
+          <p:nvPr/>
+        </p:nvSpPr>
+        <p:spPr>
+          <a:xfrm>
+            <a:off x="6286500" y="5219700"/>
+            <a:ext cx="1270000" cy="266699"/>
+          </a:xfrm>
+          <a:prstGeom prst="rect">
+            <a:avLst/>
+          </a:prstGeom>
+          <a:noFill/>
+        </p:spPr>
+        <p:txBody>
+          <a:bodyPr wrap="square" lIns="0" rIns="0" tIns="0" bIns="0" anchor="ctr">
+            <a:spAutoFit/>
+          </a:bodyPr>
+          <a:lstStyle/>
+          <a:p>
+            <a:pPr algn="l">
+              <a:lnSpc>
+                <a:spcPct val="120000"/>
+              </a:lnSpc>
+            </a:pPr>
+            <a:r>
+              <a:rPr sz="1000" b="0">
                 <a:solidFill>
                   <a:srgbClr val="4A5878"/>
                 </a:solidFill>
                 <a:latin typeface="Pretendard Variable"/>
               </a:rPr>
-              <a:t>국세청 사업자등록정보 진위확인</a:t>
-            </a:r>
-          </a:p>
-        </p:txBody>
-      </p:sp>
-      <p:sp>
-        <p:nvSpPr>
-          <p:cNvPr id="52" name="TextBox 51"/>
-          <p:cNvSpPr txBox="1"/>
-          <p:nvPr/>
-        </p:nvSpPr>
-        <p:spPr>
-          <a:xfrm>
-            <a:off x="8762999" y="5321299"/>
-            <a:ext cx="1968500" cy="279400"/>
+              <a:t>국세청</a:t>
+            </a:r>
+          </a:p>
+        </p:txBody>
+      </p:sp>
+      <p:sp>
+        <p:nvSpPr>
+          <p:cNvPr id="62" name="TextBox 61"/>
+          <p:cNvSpPr txBox="1"/>
+          <p:nvPr/>
+        </p:nvSpPr>
+        <p:spPr>
+          <a:xfrm>
+            <a:off x="7619999" y="5219700"/>
+            <a:ext cx="2603499" cy="266699"/>
           </a:xfrm>
           <a:prstGeom prst="rect">
             <a:avLst/>
@@ -30306,27 +30714,27 @@
               </a:lnSpc>
             </a:pPr>
             <a:r>
-              <a:rPr sz="1100" b="0">
+              <a:rPr sz="1000" b="0">
                 <a:solidFill>
                   <a:srgbClr val="4A5878"/>
                 </a:solidFill>
                 <a:latin typeface="Pretendard Variable"/>
               </a:rPr>
-              <a:t>온보딩 가게 검증</a:t>
-            </a:r>
-          </a:p>
-        </p:txBody>
-      </p:sp>
-      <p:sp>
-        <p:nvSpPr>
-          <p:cNvPr id="53" name="TextBox 52"/>
-          <p:cNvSpPr txBox="1"/>
-          <p:nvPr/>
-        </p:nvSpPr>
-        <p:spPr>
-          <a:xfrm>
-            <a:off x="10795000" y="5321299"/>
-            <a:ext cx="787400" cy="279400"/>
+              <a:t>온보딩 사업자번호 검증</a:t>
+            </a:r>
+          </a:p>
+        </p:txBody>
+      </p:sp>
+      <p:sp>
+        <p:nvSpPr>
+          <p:cNvPr id="63" name="TextBox 62"/>
+          <p:cNvSpPr txBox="1"/>
+          <p:nvPr/>
+        </p:nvSpPr>
+        <p:spPr>
+          <a:xfrm>
+            <a:off x="10287000" y="5219700"/>
+            <a:ext cx="761999" cy="266699"/>
           </a:xfrm>
           <a:prstGeom prst="rect">
             <a:avLst/>
@@ -30345,7 +30753,7 @@
               </a:lnSpc>
             </a:pPr>
             <a:r>
-              <a:rPr sz="1100" b="0">
+              <a:rPr sz="1000" b="0">
                 <a:solidFill>
                   <a:srgbClr val="8A95AE"/>
                 </a:solidFill>
@@ -30358,14 +30766,14 @@
       </p:sp>
       <p:sp>
         <p:nvSpPr>
-          <p:cNvPr id="54" name="TextBox 53"/>
-          <p:cNvSpPr txBox="1"/>
-          <p:nvPr/>
-        </p:nvSpPr>
-        <p:spPr>
-          <a:xfrm>
-            <a:off x="609600" y="5702300"/>
-            <a:ext cx="2413000" cy="279400"/>
+          <p:cNvPr id="64" name="TextBox 63"/>
+          <p:cNvSpPr txBox="1"/>
+          <p:nvPr/>
+        </p:nvSpPr>
+        <p:spPr>
+          <a:xfrm>
+            <a:off x="609600" y="5588000"/>
+            <a:ext cx="952499" cy="266699"/>
           </a:xfrm>
           <a:prstGeom prst="rect">
             <a:avLst/>
@@ -30384,27 +30792,27 @@
               </a:lnSpc>
             </a:pPr>
             <a:r>
-              <a:rPr sz="1100" b="1">
+              <a:rPr sz="1000" b="1">
                 <a:solidFill>
                   <a:srgbClr val="8A95AE"/>
                 </a:solidFill>
                 <a:latin typeface="Pretendard Variable"/>
               </a:rPr>
-              <a:t>민간 API</a:t>
-            </a:r>
-          </a:p>
-        </p:txBody>
-      </p:sp>
-      <p:sp>
-        <p:nvSpPr>
-          <p:cNvPr id="55" name="TextBox 54"/>
-          <p:cNvSpPr txBox="1"/>
-          <p:nvPr/>
-        </p:nvSpPr>
-        <p:spPr>
-          <a:xfrm>
-            <a:off x="3047999" y="5702300"/>
-            <a:ext cx="5588000" cy="279400"/>
+              <a:t>공공데이터포털</a:t>
+            </a:r>
+          </a:p>
+        </p:txBody>
+      </p:sp>
+      <p:sp>
+        <p:nvSpPr>
+          <p:cNvPr id="65" name="TextBox 64"/>
+          <p:cNvSpPr txBox="1"/>
+          <p:nvPr/>
+        </p:nvSpPr>
+        <p:spPr>
+          <a:xfrm>
+            <a:off x="1612900" y="5588000"/>
+            <a:ext cx="4572000" cy="266699"/>
           </a:xfrm>
           <a:prstGeom prst="rect">
             <a:avLst/>
@@ -30423,27 +30831,66 @@
               </a:lnSpc>
             </a:pPr>
             <a:r>
-              <a:rPr sz="1100" b="0">
+              <a:rPr sz="1050" b="0">
+                <a:solidFill>
+                  <a:srgbClr val="0B1A33"/>
+                </a:solidFill>
+                <a:latin typeface="Pretendard Variable"/>
+              </a:rPr>
+              <a:t>기상청_단기예보 조회서비스</a:t>
+            </a:r>
+          </a:p>
+        </p:txBody>
+      </p:sp>
+      <p:sp>
+        <p:nvSpPr>
+          <p:cNvPr id="66" name="TextBox 65"/>
+          <p:cNvSpPr txBox="1"/>
+          <p:nvPr/>
+        </p:nvSpPr>
+        <p:spPr>
+          <a:xfrm>
+            <a:off x="6286500" y="5588000"/>
+            <a:ext cx="1270000" cy="266699"/>
+          </a:xfrm>
+          <a:prstGeom prst="rect">
+            <a:avLst/>
+          </a:prstGeom>
+          <a:noFill/>
+        </p:spPr>
+        <p:txBody>
+          <a:bodyPr wrap="square" lIns="0" rIns="0" tIns="0" bIns="0" anchor="ctr">
+            <a:spAutoFit/>
+          </a:bodyPr>
+          <a:lstStyle/>
+          <a:p>
+            <a:pPr algn="l">
+              <a:lnSpc>
+                <a:spcPct val="120000"/>
+              </a:lnSpc>
+            </a:pPr>
+            <a:r>
+              <a:rPr sz="1000" b="0">
                 <a:solidFill>
                   <a:srgbClr val="4A5878"/>
                 </a:solidFill>
                 <a:latin typeface="Pretendard Variable"/>
               </a:rPr>
-              <a:t>Kakao Local Search · 카카오 디벨로퍼스</a:t>
-            </a:r>
-          </a:p>
-        </p:txBody>
-      </p:sp>
-      <p:sp>
-        <p:nvSpPr>
-          <p:cNvPr id="56" name="TextBox 55"/>
-          <p:cNvSpPr txBox="1"/>
-          <p:nvPr/>
-        </p:nvSpPr>
-        <p:spPr>
-          <a:xfrm>
-            <a:off x="8762999" y="5702300"/>
-            <a:ext cx="1968500" cy="279400"/>
+              <a:t>기상청</a:t>
+            </a:r>
+          </a:p>
+        </p:txBody>
+      </p:sp>
+      <p:sp>
+        <p:nvSpPr>
+          <p:cNvPr id="67" name="TextBox 66"/>
+          <p:cNvSpPr txBox="1"/>
+          <p:nvPr/>
+        </p:nvSpPr>
+        <p:spPr>
+          <a:xfrm>
+            <a:off x="7619999" y="5588000"/>
+            <a:ext cx="2603499" cy="266699"/>
           </a:xfrm>
           <a:prstGeom prst="rect">
             <a:avLst/>
@@ -30462,27 +30909,27 @@
               </a:lnSpc>
             </a:pPr>
             <a:r>
-              <a:rPr sz="1100" b="0">
+              <a:rPr sz="1000" b="0">
                 <a:solidFill>
                   <a:srgbClr val="4A5878"/>
                 </a:solidFill>
                 <a:latin typeface="Pretendard Variable"/>
               </a:rPr>
-              <a:t>가게 검색·좌표</a:t>
-            </a:r>
-          </a:p>
-        </p:txBody>
-      </p:sp>
-      <p:sp>
-        <p:nvSpPr>
-          <p:cNvPr id="57" name="TextBox 56"/>
-          <p:cNvSpPr txBox="1"/>
-          <p:nvPr/>
-        </p:nvSpPr>
-        <p:spPr>
-          <a:xfrm>
-            <a:off x="10795000" y="5702300"/>
-            <a:ext cx="787400" cy="279400"/>
+              <a:t>날씨 기반 액션 보정</a:t>
+            </a:r>
+          </a:p>
+        </p:txBody>
+      </p:sp>
+      <p:sp>
+        <p:nvSpPr>
+          <p:cNvPr id="68" name="TextBox 67"/>
+          <p:cNvSpPr txBox="1"/>
+          <p:nvPr/>
+        </p:nvSpPr>
+        <p:spPr>
+          <a:xfrm>
+            <a:off x="10287000" y="5588000"/>
+            <a:ext cx="761999" cy="266699"/>
           </a:xfrm>
           <a:prstGeom prst="rect">
             <a:avLst/>
@@ -30501,7 +30948,7 @@
               </a:lnSpc>
             </a:pPr>
             <a:r>
-              <a:rPr sz="1100" b="0">
+              <a:rPr sz="1000" b="0">
                 <a:solidFill>
                   <a:srgbClr val="8A95AE"/>
                 </a:solidFill>
@@ -30514,14 +30961,14 @@
       </p:sp>
       <p:sp>
         <p:nvSpPr>
-          <p:cNvPr id="58" name="TextBox 57"/>
-          <p:cNvSpPr txBox="1"/>
-          <p:nvPr/>
-        </p:nvSpPr>
-        <p:spPr>
-          <a:xfrm>
-            <a:off x="609600" y="6134100"/>
-            <a:ext cx="9525000" cy="190499"/>
+          <p:cNvPr id="69" name="TextBox 68"/>
+          <p:cNvSpPr txBox="1"/>
+          <p:nvPr/>
+        </p:nvSpPr>
+        <p:spPr>
+          <a:xfrm>
+            <a:off x="609600" y="6019800"/>
+            <a:ext cx="10972800" cy="177799"/>
           </a:xfrm>
           <a:prstGeom prst="rect">
             <a:avLst/>
@@ -30540,20 +30987,20 @@
               </a:lnSpc>
             </a:pPr>
             <a:r>
-              <a:rPr sz="1200" b="1">
+              <a:rPr sz="1150" b="1">
                 <a:solidFill>
                   <a:srgbClr val="1E6E4A"/>
                 </a:solidFill>
                 <a:latin typeface="Pretendard Variable"/>
               </a:rPr>
-              <a:t>공공데이터 8종 결합 — 경진대회 결합 활용 가점(+2) 요건 충족. 추출일 2026-04.</a:t>
+              <a:t>공공데이터 10종 결합 — 경진대회 결합 활용 가점(+2) 요건 충족. 교통분야 제외. 추출일 2026-04. ※ 가게 검색은 카카오 로컬 장소검색(카카오 개발자 API) 별도 사용.</a:t>
             </a:r>
           </a:p>
         </p:txBody>
       </p:sp>
       <p:cxnSp>
         <p:nvCxnSpPr>
-          <p:cNvPr id="59" name="Connector 58"/>
+          <p:cNvPr id="70" name="Connector 69"/>
           <p:cNvCxnSpPr/>
           <p:nvPr/>
         </p:nvCxnSpPr>
@@ -30589,7 +31036,7 @@
       </p:cxnSp>
       <p:sp>
         <p:nvSpPr>
-          <p:cNvPr id="60" name="TextBox 59"/>
+          <p:cNvPr id="71" name="TextBox 70"/>
           <p:cNvSpPr txBox="1"/>
           <p:nvPr/>
         </p:nvSpPr>
@@ -30621,14 +31068,14 @@
                 </a:solidFill>
                 <a:latin typeface="Pretendard Variable"/>
               </a:rPr>
-              <a:t>전 API 는 backend/app/services/seoul_api_service.py 에서 retry+fallback 패턴으로 호출</a:t>
-            </a:r>
-          </a:p>
-        </p:txBody>
-      </p:sp>
-      <p:sp>
-        <p:nvSpPr>
-          <p:cNvPr id="61" name="TextBox 60"/>
+              <a:t>전 외부 호출은 backend/app/services 에서 재시도·대체(retry+fallback) 패턴으로 처리</a:t>
+            </a:r>
+          </a:p>
+        </p:txBody>
+      </p:sp>
+      <p:sp>
+        <p:nvSpPr>
+          <p:cNvPr id="72" name="TextBox 71"/>
           <p:cNvSpPr txBox="1"/>
           <p:nvPr/>
         </p:nvSpPr>
@@ -32698,7 +33145,7 @@
                 </a:solidFill>
                 <a:latin typeface="Pretendard Variable"/>
               </a:rPr>
-              <a:t>우리마을가게 상권분석(추정매출 VwsmTrdarSelngQq·점포수 VwsmTrdarStorQq) · 상권변화지표(VwsmTrdarIxQq) · 상권 유동인구(VwsmTrdarFlpopQq).</a:t>
+              <a:t>서울시 상권분석서비스(추정매출-상권·점포-상권·상권변화지표-상권·길단위인구-상권).</a:t>
             </a:r>
           </a:p>
         </p:txBody>
@@ -33883,7 +34330,7 @@
                 </a:solidFill>
                 <a:latin typeface="Pretendard Variable"/>
               </a:rPr>
-              <a:t>위험 신호 · 매칭된 지원사업(마감 임박) · 서울 문화행사(culturalEventInfo) 를 종합.</a:t>
+              <a:t>위험 신호 · 매칭된 지원사업(마감 임박) · 서울시 문화행사 정보를 종합.</a:t>
             </a:r>
           </a:p>
         </p:txBody>
